--- a/neuro/latex/fig/architecture_diagram.pptx
+++ b/neuro/latex/fig/architecture_diagram.pptx
@@ -4,8 +4,11 @@
   <p:sldMasterIdLst>
     <p:sldMasterId id="2147483648" r:id="rId1"/>
   </p:sldMasterIdLst>
+  <p:notesMasterIdLst>
+    <p:notesMasterId r:id="rId4"/>
+  </p:notesMasterIdLst>
   <p:sldIdLst>
-    <p:sldId id="256" r:id="rId2"/>
+    <p:sldId id="256" r:id="rId3"/>
   </p:sldIdLst>
   <p:sldSz cx="12192000" cy="6858000"/>
   <p:notesSz cx="6858000" cy="9144000"/>
@@ -104,12 +107,406 @@
       </a:defRPr>
     </a:lvl9pPr>
   </p:defaultTextStyle>
-  <p:extLst>
-    <p:ext uri="{EFAFB233-063F-42B5-8137-9DF3F51BA10A}">
-      <p15:sldGuideLst xmlns:p15="http://schemas.microsoft.com/office/powerpoint/2012/main"/>
-    </p:ext>
-  </p:extLst>
 </p:presentation>
+</file>
+
+<file path=ppt/notesMasters/notesMaster1.xml><?xml version="1.0" encoding="utf-8"?>
+<p:notesMaster xmlns:a="http://schemas.openxmlformats.org/drawingml/2006/main" xmlns:r="http://schemas.openxmlformats.org/officeDocument/2006/relationships" xmlns:p="http://schemas.openxmlformats.org/presentationml/2006/main">
+  <p:cSld>
+    <p:bg>
+      <p:bgRef idx="1001">
+        <a:schemeClr val="bg1"/>
+      </p:bgRef>
+    </p:bg>
+    <p:spTree>
+      <p:nvGrpSpPr>
+        <p:cNvPr id="1" name=""/>
+        <p:cNvGrpSpPr/>
+        <p:nvPr/>
+      </p:nvGrpSpPr>
+      <p:grpSpPr>
+        <a:xfrm>
+          <a:off x="0" y="0"/>
+          <a:ext cx="0" cy="0"/>
+          <a:chOff x="0" y="0"/>
+          <a:chExt cx="0" cy="0"/>
+        </a:xfrm>
+      </p:grpSpPr>
+      <p:sp>
+        <p:nvSpPr>
+          <p:cNvPr id="2" name="页眉占位符 1"/>
+          <p:cNvSpPr>
+            <a:spLocks noGrp="1"/>
+          </p:cNvSpPr>
+          <p:nvPr>
+            <p:ph type="hdr" sz="quarter"/>
+          </p:nvPr>
+        </p:nvSpPr>
+        <p:spPr>
+          <a:xfrm>
+            <a:off x="0" y="0"/>
+            <a:ext cx="2971800" cy="458788"/>
+          </a:xfrm>
+          <a:prstGeom prst="rect">
+            <a:avLst/>
+          </a:prstGeom>
+        </p:spPr>
+        <p:txBody>
+          <a:bodyPr vert="horz" lIns="91440" tIns="45720" rIns="91440" bIns="45720" rtlCol="0"/>
+          <a:lstStyle>
+            <a:lvl1pPr algn="l">
+              <a:defRPr sz="1200"/>
+            </a:lvl1pPr>
+          </a:lstStyle>
+          <a:p>
+            <a:endParaRPr lang="zh-CN" altLang="en-US"/>
+          </a:p>
+        </p:txBody>
+      </p:sp>
+      <p:sp>
+        <p:nvSpPr>
+          <p:cNvPr id="3" name="日期占位符 2"/>
+          <p:cNvSpPr>
+            <a:spLocks noGrp="1"/>
+          </p:cNvSpPr>
+          <p:nvPr>
+            <p:ph type="dt" idx="1"/>
+          </p:nvPr>
+        </p:nvSpPr>
+        <p:spPr>
+          <a:xfrm>
+            <a:off x="3884613" y="0"/>
+            <a:ext cx="2971800" cy="458788"/>
+          </a:xfrm>
+          <a:prstGeom prst="rect">
+            <a:avLst/>
+          </a:prstGeom>
+        </p:spPr>
+        <p:txBody>
+          <a:bodyPr vert="horz" lIns="91440" tIns="45720" rIns="91440" bIns="45720" rtlCol="0"/>
+          <a:lstStyle>
+            <a:lvl1pPr algn="r">
+              <a:defRPr sz="1200"/>
+            </a:lvl1pPr>
+          </a:lstStyle>
+          <a:p>
+            <a:fld id="{D2A48B96-639E-45A3-A0BA-2464DFDB1FAA}" type="datetimeFigureOut">
+              <a:rPr lang="zh-CN" altLang="en-US" smtClean="0"/>
+            </a:fld>
+            <a:endParaRPr lang="zh-CN" altLang="en-US"/>
+          </a:p>
+        </p:txBody>
+      </p:sp>
+      <p:sp>
+        <p:nvSpPr>
+          <p:cNvPr id="4" name="幻灯片图像占位符 3"/>
+          <p:cNvSpPr>
+            <a:spLocks noGrp="1" noRot="1" noChangeAspect="1"/>
+          </p:cNvSpPr>
+          <p:nvPr>
+            <p:ph type="sldImg" idx="2"/>
+          </p:nvPr>
+        </p:nvSpPr>
+        <p:spPr>
+          <a:xfrm>
+            <a:off x="685800" y="1143000"/>
+            <a:ext cx="5486400" cy="3086100"/>
+          </a:xfrm>
+          <a:prstGeom prst="rect">
+            <a:avLst/>
+          </a:prstGeom>
+          <a:noFill/>
+          <a:ln w="12700">
+            <a:solidFill>
+              <a:prstClr val="black"/>
+            </a:solidFill>
+          </a:ln>
+        </p:spPr>
+        <p:txBody>
+          <a:bodyPr vert="horz" lIns="91440" tIns="45720" rIns="91440" bIns="45720" rtlCol="0" anchor="ctr"/>
+          <a:lstStyle/>
+          <a:p>
+            <a:endParaRPr lang="zh-CN" altLang="en-US"/>
+          </a:p>
+        </p:txBody>
+      </p:sp>
+      <p:sp>
+        <p:nvSpPr>
+          <p:cNvPr id="5" name="备注占位符 4"/>
+          <p:cNvSpPr>
+            <a:spLocks noGrp="1"/>
+          </p:cNvSpPr>
+          <p:nvPr>
+            <p:ph type="body" sz="quarter" idx="3"/>
+          </p:nvPr>
+        </p:nvSpPr>
+        <p:spPr>
+          <a:xfrm>
+            <a:off x="685800" y="4400550"/>
+            <a:ext cx="5486400" cy="3600450"/>
+          </a:xfrm>
+          <a:prstGeom prst="rect">
+            <a:avLst/>
+          </a:prstGeom>
+        </p:spPr>
+        <p:txBody>
+          <a:bodyPr vert="horz" lIns="91440" tIns="45720" rIns="91440" bIns="45720" rtlCol="0"/>
+          <a:lstStyle/>
+          <a:p>
+            <a:pPr lvl="0"/>
+            <a:r>
+              <a:rPr lang="zh-CN" altLang="en-US" smtClean="0"/>
+              <a:t>单击此处编辑母版文本样式</a:t>
+            </a:r>
+            <a:endParaRPr lang="zh-CN" altLang="en-US" smtClean="0"/>
+          </a:p>
+          <a:p>
+            <a:pPr lvl="1"/>
+            <a:r>
+              <a:rPr lang="zh-CN" altLang="en-US" smtClean="0"/>
+              <a:t>第二级</a:t>
+            </a:r>
+            <a:endParaRPr lang="zh-CN" altLang="en-US" smtClean="0"/>
+          </a:p>
+          <a:p>
+            <a:pPr lvl="2"/>
+            <a:r>
+              <a:rPr lang="zh-CN" altLang="en-US" smtClean="0"/>
+              <a:t>第三级</a:t>
+            </a:r>
+            <a:endParaRPr lang="zh-CN" altLang="en-US" smtClean="0"/>
+          </a:p>
+          <a:p>
+            <a:pPr lvl="3"/>
+            <a:r>
+              <a:rPr lang="zh-CN" altLang="en-US" smtClean="0"/>
+              <a:t>第四级</a:t>
+            </a:r>
+            <a:endParaRPr lang="zh-CN" altLang="en-US" smtClean="0"/>
+          </a:p>
+          <a:p>
+            <a:pPr lvl="4"/>
+            <a:r>
+              <a:rPr lang="zh-CN" altLang="en-US" smtClean="0"/>
+              <a:t>第五级</a:t>
+            </a:r>
+            <a:endParaRPr lang="zh-CN" altLang="en-US"/>
+          </a:p>
+        </p:txBody>
+      </p:sp>
+      <p:sp>
+        <p:nvSpPr>
+          <p:cNvPr id="6" name="页脚占位符 5"/>
+          <p:cNvSpPr>
+            <a:spLocks noGrp="1"/>
+          </p:cNvSpPr>
+          <p:nvPr>
+            <p:ph type="ftr" sz="quarter" idx="4"/>
+          </p:nvPr>
+        </p:nvSpPr>
+        <p:spPr>
+          <a:xfrm>
+            <a:off x="0" y="8685213"/>
+            <a:ext cx="2971800" cy="458787"/>
+          </a:xfrm>
+          <a:prstGeom prst="rect">
+            <a:avLst/>
+          </a:prstGeom>
+        </p:spPr>
+        <p:txBody>
+          <a:bodyPr vert="horz" lIns="91440" tIns="45720" rIns="91440" bIns="45720" rtlCol="0" anchor="b"/>
+          <a:lstStyle>
+            <a:lvl1pPr algn="l">
+              <a:defRPr sz="1200"/>
+            </a:lvl1pPr>
+          </a:lstStyle>
+          <a:p>
+            <a:endParaRPr lang="zh-CN" altLang="en-US"/>
+          </a:p>
+        </p:txBody>
+      </p:sp>
+      <p:sp>
+        <p:nvSpPr>
+          <p:cNvPr id="7" name="灯片编号占位符 6"/>
+          <p:cNvSpPr>
+            <a:spLocks noGrp="1"/>
+          </p:cNvSpPr>
+          <p:nvPr>
+            <p:ph type="sldNum" sz="quarter" idx="5"/>
+          </p:nvPr>
+        </p:nvSpPr>
+        <p:spPr>
+          <a:xfrm>
+            <a:off x="3884613" y="8685213"/>
+            <a:ext cx="2971800" cy="458787"/>
+          </a:xfrm>
+          <a:prstGeom prst="rect">
+            <a:avLst/>
+          </a:prstGeom>
+        </p:spPr>
+        <p:txBody>
+          <a:bodyPr vert="horz" lIns="91440" tIns="45720" rIns="91440" bIns="45720" rtlCol="0" anchor="b"/>
+          <a:lstStyle>
+            <a:lvl1pPr algn="r">
+              <a:defRPr sz="1200"/>
+            </a:lvl1pPr>
+          </a:lstStyle>
+          <a:p>
+            <a:fld id="{A6837353-30EB-4A48-80EB-173D804AEFBD}" type="slidenum">
+              <a:rPr lang="zh-CN" altLang="en-US" smtClean="0"/>
+            </a:fld>
+            <a:endParaRPr lang="zh-CN" altLang="en-US"/>
+          </a:p>
+        </p:txBody>
+      </p:sp>
+    </p:spTree>
+  </p:cSld>
+  <p:clrMap bg1="lt1" tx1="dk1" bg2="lt2" tx2="dk2" accent1="accent1" accent2="accent2" accent3="accent3" accent4="accent4" accent5="accent5" accent6="accent6" hlink="hlink" folHlink="folHlink"/>
+  <p:notesStyle>
+    <a:lvl1pPr marL="0" algn="l" defTabSz="914400" rtl="0" eaLnBrk="1" latinLnBrk="0" hangingPunct="1">
+      <a:defRPr sz="1200" kern="1200">
+        <a:solidFill>
+          <a:schemeClr val="tx1"/>
+        </a:solidFill>
+        <a:latin typeface="+mn-lt"/>
+        <a:ea typeface="+mn-ea"/>
+        <a:cs typeface="+mn-cs"/>
+      </a:defRPr>
+    </a:lvl1pPr>
+    <a:lvl2pPr marL="457200" algn="l" defTabSz="914400" rtl="0" eaLnBrk="1" latinLnBrk="0" hangingPunct="1">
+      <a:defRPr sz="1200" kern="1200">
+        <a:solidFill>
+          <a:schemeClr val="tx1"/>
+        </a:solidFill>
+        <a:latin typeface="+mn-lt"/>
+        <a:ea typeface="+mn-ea"/>
+        <a:cs typeface="+mn-cs"/>
+      </a:defRPr>
+    </a:lvl2pPr>
+    <a:lvl3pPr marL="914400" algn="l" defTabSz="914400" rtl="0" eaLnBrk="1" latinLnBrk="0" hangingPunct="1">
+      <a:defRPr sz="1200" kern="1200">
+        <a:solidFill>
+          <a:schemeClr val="tx1"/>
+        </a:solidFill>
+        <a:latin typeface="+mn-lt"/>
+        <a:ea typeface="+mn-ea"/>
+        <a:cs typeface="+mn-cs"/>
+      </a:defRPr>
+    </a:lvl3pPr>
+    <a:lvl4pPr marL="1371600" algn="l" defTabSz="914400" rtl="0" eaLnBrk="1" latinLnBrk="0" hangingPunct="1">
+      <a:defRPr sz="1200" kern="1200">
+        <a:solidFill>
+          <a:schemeClr val="tx1"/>
+        </a:solidFill>
+        <a:latin typeface="+mn-lt"/>
+        <a:ea typeface="+mn-ea"/>
+        <a:cs typeface="+mn-cs"/>
+      </a:defRPr>
+    </a:lvl4pPr>
+    <a:lvl5pPr marL="1828800" algn="l" defTabSz="914400" rtl="0" eaLnBrk="1" latinLnBrk="0" hangingPunct="1">
+      <a:defRPr sz="1200" kern="1200">
+        <a:solidFill>
+          <a:schemeClr val="tx1"/>
+        </a:solidFill>
+        <a:latin typeface="+mn-lt"/>
+        <a:ea typeface="+mn-ea"/>
+        <a:cs typeface="+mn-cs"/>
+      </a:defRPr>
+    </a:lvl5pPr>
+    <a:lvl6pPr marL="2286000" algn="l" defTabSz="914400" rtl="0" eaLnBrk="1" latinLnBrk="0" hangingPunct="1">
+      <a:defRPr sz="1200" kern="1200">
+        <a:solidFill>
+          <a:schemeClr val="tx1"/>
+        </a:solidFill>
+        <a:latin typeface="+mn-lt"/>
+        <a:ea typeface="+mn-ea"/>
+        <a:cs typeface="+mn-cs"/>
+      </a:defRPr>
+    </a:lvl6pPr>
+    <a:lvl7pPr marL="2743200" algn="l" defTabSz="914400" rtl="0" eaLnBrk="1" latinLnBrk="0" hangingPunct="1">
+      <a:defRPr sz="1200" kern="1200">
+        <a:solidFill>
+          <a:schemeClr val="tx1"/>
+        </a:solidFill>
+        <a:latin typeface="+mn-lt"/>
+        <a:ea typeface="+mn-ea"/>
+        <a:cs typeface="+mn-cs"/>
+      </a:defRPr>
+    </a:lvl7pPr>
+    <a:lvl8pPr marL="3200400" algn="l" defTabSz="914400" rtl="0" eaLnBrk="1" latinLnBrk="0" hangingPunct="1">
+      <a:defRPr sz="1200" kern="1200">
+        <a:solidFill>
+          <a:schemeClr val="tx1"/>
+        </a:solidFill>
+        <a:latin typeface="+mn-lt"/>
+        <a:ea typeface="+mn-ea"/>
+        <a:cs typeface="+mn-cs"/>
+      </a:defRPr>
+    </a:lvl8pPr>
+    <a:lvl9pPr marL="3657600" algn="l" defTabSz="914400" rtl="0" eaLnBrk="1" latinLnBrk="0" hangingPunct="1">
+      <a:defRPr sz="1200" kern="1200">
+        <a:solidFill>
+          <a:schemeClr val="tx1"/>
+        </a:solidFill>
+        <a:latin typeface="+mn-lt"/>
+        <a:ea typeface="+mn-ea"/>
+        <a:cs typeface="+mn-cs"/>
+      </a:defRPr>
+    </a:lvl9pPr>
+  </p:notesStyle>
+</p:notesMaster>
+</file>
+
+<file path=ppt/notesSlides/notesSlide1.xml><?xml version="1.0" encoding="utf-8"?>
+<p:notes xmlns:a="http://schemas.openxmlformats.org/drawingml/2006/main" xmlns:r="http://schemas.openxmlformats.org/officeDocument/2006/relationships" xmlns:p="http://schemas.openxmlformats.org/presentationml/2006/main">
+  <p:cSld>
+    <p:spTree>
+      <p:nvGrpSpPr>
+        <p:cNvPr id="1" name=""/>
+        <p:cNvGrpSpPr/>
+        <p:nvPr/>
+      </p:nvGrpSpPr>
+      <p:grpSpPr/>
+      <p:sp>
+        <p:nvSpPr>
+          <p:cNvPr id="2" name="幻灯片图像占位符 1"/>
+          <p:cNvSpPr>
+            <a:spLocks noGrp="1"/>
+          </p:cNvSpPr>
+          <p:nvPr>
+            <p:ph type="sldImg" idx="2"/>
+          </p:nvPr>
+        </p:nvSpPr>
+        <p:spPr/>
+      </p:sp>
+      <p:sp>
+        <p:nvSpPr>
+          <p:cNvPr id="3" name="文本占位符 2"/>
+          <p:cNvSpPr>
+            <a:spLocks noGrp="1"/>
+          </p:cNvSpPr>
+          <p:nvPr>
+            <p:ph type="body" idx="3"/>
+          </p:nvPr>
+        </p:nvSpPr>
+        <p:spPr/>
+        <p:txBody>
+          <a:bodyPr/>
+          <a:p>
+            <a:r>
+              <a:rPr lang="en-US" altLang="zh-CN"/>
+              <a:t>2_framework</a:t>
+            </a:r>
+            <a:endParaRPr lang="en-US" altLang="zh-CN"/>
+          </a:p>
+        </p:txBody>
+      </p:sp>
+    </p:spTree>
+  </p:cSld>
+  <p:clrMapOvr>
+    <a:masterClrMapping/>
+  </p:clrMapOvr>
+</p:notes>
 </file>
 
 <file path=ppt/slideLayouts/slideLayout1.xml><?xml version="1.0" encoding="utf-8"?>
@@ -481,14 +878,14 @@
         </p:grpSpPr>
         <p:pic>
           <p:nvPicPr>
-            <p:cNvPr id="2" name="picture 2"/>
+            <p:cNvPr id="3" name="picture 2"/>
             <p:cNvPicPr>
               <a:picLocks noChangeAspect="1"/>
             </p:cNvPicPr>
             <p:nvPr/>
           </p:nvPicPr>
           <p:blipFill>
-            <a:blip r:embed="rId2"/>
+            <a:blip r:embed="rId1"/>
             <a:stretch>
               <a:fillRect/>
             </a:stretch>
@@ -530,14 +927,13 @@
             <a:p>
               <a:pPr algn="l" rtl="0" eaLnBrk="0">
                 <a:lnSpc>
-                  <a:spcPct val="74296"/>
-                </a:lnSpc>
-                <a:tabLst/>
+                  <a:spcPct val="74000"/>
+                </a:lnSpc>
               </a:pPr>
               <a:endParaRPr sz="100" dirty="0">
-                <a:latin typeface="Arial"/>
-                <a:ea typeface="Arial"/>
-                <a:cs typeface="Arial"/>
+                <a:latin typeface="Arial" panose="020B0604020202020204"/>
+                <a:ea typeface="Arial" panose="020B0604020202020204"/>
+                <a:cs typeface="Arial" panose="020B0604020202020204"/>
               </a:endParaRPr>
             </a:p>
             <a:p>
@@ -545,7 +941,6 @@
                 <a:lnSpc>
                   <a:spcPct val="78000"/>
                 </a:lnSpc>
-                <a:tabLst/>
               </a:pPr>
               <a:r>
                 <a:rPr sz="2000" b="1" kern="0" spc="0" dirty="0">
@@ -554,9 +949,9 @@
                       <a:alpha val="100000"/>
                     </a:srgbClr>
                   </a:solidFill>
-                  <a:latin typeface="Times New Roman"/>
-                  <a:ea typeface="Times New Roman"/>
-                  <a:cs typeface="Times New Roman"/>
+                  <a:latin typeface="Times New Roman" panose="02020603050405020304"/>
+                  <a:ea typeface="Times New Roman" panose="02020603050405020304"/>
+                  <a:cs typeface="Times New Roman" panose="02020603050405020304"/>
                 </a:rPr>
                 <a:t>Vestibular Sy</a:t>
               </a:r>
@@ -567,16 +962,16 @@
                       <a:alpha val="100000"/>
                     </a:srgbClr>
                   </a:solidFill>
-                  <a:latin typeface="Times New Roman"/>
-                  <a:ea typeface="Times New Roman"/>
-                  <a:cs typeface="Times New Roman"/>
+                  <a:latin typeface="Times New Roman" panose="02020603050405020304"/>
+                  <a:ea typeface="Times New Roman" panose="02020603050405020304"/>
+                  <a:cs typeface="Times New Roman" panose="02020603050405020304"/>
                 </a:rPr>
                 <a:t>stem</a:t>
               </a:r>
               <a:endParaRPr sz="2000" dirty="0">
-                <a:latin typeface="Times New Roman"/>
-                <a:ea typeface="Times New Roman"/>
-                <a:cs typeface="Times New Roman"/>
+                <a:latin typeface="Times New Roman" panose="02020603050405020304"/>
+                <a:ea typeface="Times New Roman" panose="02020603050405020304"/>
+                <a:cs typeface="Times New Roman" panose="02020603050405020304"/>
               </a:endParaRPr>
             </a:p>
             <a:p>
@@ -584,12 +979,11 @@
                 <a:lnSpc>
                   <a:spcPct val="146000"/>
                 </a:lnSpc>
-                <a:tabLst/>
               </a:pPr>
               <a:endParaRPr sz="1000" dirty="0">
-                <a:latin typeface="Arial"/>
-                <a:ea typeface="Arial"/>
-                <a:cs typeface="Arial"/>
+                <a:latin typeface="Arial" panose="020B0604020202020204"/>
+                <a:ea typeface="Arial" panose="020B0604020202020204"/>
+                <a:cs typeface="Arial" panose="020B0604020202020204"/>
               </a:endParaRPr>
             </a:p>
             <a:p>
@@ -600,7 +994,6 @@
                 <a:spcBef>
                   <a:spcPts val="515"/>
                 </a:spcBef>
-                <a:tabLst/>
               </a:pPr>
               <a:r>
                 <a:rPr sz="1700" kern="0" spc="50" dirty="0">
@@ -609,9 +1002,9 @@
                       <a:alpha val="100000"/>
                     </a:srgbClr>
                   </a:solidFill>
-                  <a:latin typeface="Arial"/>
-                  <a:ea typeface="Arial"/>
-                  <a:cs typeface="Arial"/>
+                  <a:latin typeface="Arial" panose="020B0604020202020204"/>
+                  <a:ea typeface="Arial" panose="020B0604020202020204"/>
+                  <a:cs typeface="Arial" panose="020B0604020202020204"/>
                 </a:rPr>
                 <a:t>r_</a:t>
               </a:r>
@@ -622,16 +1015,16 @@
                       <a:alpha val="100000"/>
                     </a:srgbClr>
                   </a:solidFill>
-                  <a:latin typeface="Arial"/>
-                  <a:ea typeface="Arial"/>
-                  <a:cs typeface="Arial"/>
+                  <a:latin typeface="Arial" panose="020B0604020202020204"/>
+                  <a:ea typeface="Arial" panose="020B0604020202020204"/>
+                  <a:cs typeface="Arial" panose="020B0604020202020204"/>
                 </a:rPr>
                 <a:t>imu</a:t>
               </a:r>
               <a:endParaRPr sz="1700" dirty="0">
-                <a:latin typeface="Arial"/>
-                <a:ea typeface="Arial"/>
-                <a:cs typeface="Arial"/>
+                <a:latin typeface="Arial" panose="020B0604020202020204"/>
+                <a:ea typeface="Arial" panose="020B0604020202020204"/>
+                <a:cs typeface="Arial" panose="020B0604020202020204"/>
               </a:endParaRPr>
             </a:p>
             <a:p>
@@ -639,12 +1032,11 @@
                 <a:lnSpc>
                   <a:spcPct val="160000"/>
                 </a:lnSpc>
-                <a:tabLst/>
               </a:pPr>
               <a:endParaRPr sz="1000" dirty="0">
-                <a:latin typeface="Arial"/>
-                <a:ea typeface="Arial"/>
-                <a:cs typeface="Arial"/>
+                <a:latin typeface="Arial" panose="020B0604020202020204"/>
+                <a:ea typeface="Arial" panose="020B0604020202020204"/>
+                <a:cs typeface="Arial" panose="020B0604020202020204"/>
               </a:endParaRPr>
             </a:p>
             <a:p>
@@ -652,12 +1044,11 @@
                 <a:lnSpc>
                   <a:spcPct val="108000"/>
                 </a:lnSpc>
-                <a:tabLst/>
               </a:pPr>
               <a:endParaRPr sz="400" dirty="0">
-                <a:latin typeface="Arial"/>
-                <a:ea typeface="Arial"/>
-                <a:cs typeface="Arial"/>
+                <a:latin typeface="Arial" panose="020B0604020202020204"/>
+                <a:ea typeface="Arial" panose="020B0604020202020204"/>
+                <a:cs typeface="Arial" panose="020B0604020202020204"/>
               </a:endParaRPr>
             </a:p>
             <a:p>
@@ -666,9 +1057,8 @@
                   <a:spcPct val="82000"/>
                 </a:lnSpc>
                 <a:spcBef>
-                  <a:spcPts val="3"/>
+                  <a:spcPts val="5"/>
                 </a:spcBef>
-                <a:tabLst/>
               </a:pPr>
               <a:r>
                 <a:rPr sz="1700" kern="0" spc="110" dirty="0">
@@ -677,9 +1067,9 @@
                       <a:alpha val="100000"/>
                     </a:srgbClr>
                   </a:solidFill>
-                  <a:latin typeface="Times New Roman"/>
-                  <a:ea typeface="Times New Roman"/>
-                  <a:cs typeface="Times New Roman"/>
+                  <a:latin typeface="Times New Roman" panose="02020603050405020304"/>
+                  <a:ea typeface="Times New Roman" panose="02020603050405020304"/>
+                  <a:cs typeface="Times New Roman" panose="02020603050405020304"/>
                 </a:rPr>
                 <a:t>v_</a:t>
               </a:r>
@@ -690,16 +1080,16 @@
                       <a:alpha val="100000"/>
                     </a:srgbClr>
                   </a:solidFill>
-                  <a:latin typeface="Times New Roman"/>
-                  <a:ea typeface="Times New Roman"/>
-                  <a:cs typeface="Times New Roman"/>
+                  <a:latin typeface="Times New Roman" panose="02020603050405020304"/>
+                  <a:ea typeface="Times New Roman" panose="02020603050405020304"/>
+                  <a:cs typeface="Times New Roman" panose="02020603050405020304"/>
                 </a:rPr>
                 <a:t>imu</a:t>
               </a:r>
               <a:endParaRPr sz="1700" dirty="0">
-                <a:latin typeface="Times New Roman"/>
-                <a:ea typeface="Times New Roman"/>
-                <a:cs typeface="Times New Roman"/>
+                <a:latin typeface="Times New Roman" panose="02020603050405020304"/>
+                <a:ea typeface="Times New Roman" panose="02020603050405020304"/>
+                <a:cs typeface="Times New Roman" panose="02020603050405020304"/>
               </a:endParaRPr>
             </a:p>
           </p:txBody>
@@ -731,14 +1121,13 @@
             <a:p>
               <a:pPr algn="l" rtl="0" eaLnBrk="0">
                 <a:lnSpc>
-                  <a:spcPct val="91049"/>
-                </a:lnSpc>
-                <a:tabLst/>
+                  <a:spcPct val="91000"/>
+                </a:lnSpc>
               </a:pPr>
               <a:endParaRPr sz="100" dirty="0">
-                <a:latin typeface="Arial"/>
-                <a:ea typeface="Arial"/>
-                <a:cs typeface="Arial"/>
+                <a:latin typeface="Arial" panose="020B0604020202020204"/>
+                <a:ea typeface="Arial" panose="020B0604020202020204"/>
+                <a:cs typeface="Arial" panose="020B0604020202020204"/>
               </a:endParaRPr>
             </a:p>
             <a:p>
@@ -746,7 +1135,6 @@
                 <a:lnSpc>
                   <a:spcPct val="69000"/>
                 </a:lnSpc>
-                <a:tabLst/>
               </a:pPr>
               <a:r>
                 <a:rPr sz="2000" b="1" kern="0" spc="-10" dirty="0">
@@ -755,16 +1143,16 @@
                       <a:alpha val="100000"/>
                     </a:srgbClr>
                   </a:solidFill>
-                  <a:latin typeface="Times New Roman"/>
-                  <a:ea typeface="Times New Roman"/>
-                  <a:cs typeface="Times New Roman"/>
+                  <a:latin typeface="Times New Roman" panose="02020603050405020304"/>
+                  <a:ea typeface="Times New Roman" panose="02020603050405020304"/>
+                  <a:cs typeface="Times New Roman" panose="02020603050405020304"/>
                 </a:rPr>
                 <a:t>Visual Cortex</a:t>
               </a:r>
               <a:endParaRPr sz="2000" dirty="0">
-                <a:latin typeface="Times New Roman"/>
-                <a:ea typeface="Times New Roman"/>
-                <a:cs typeface="Times New Roman"/>
+                <a:latin typeface="Times New Roman" panose="02020603050405020304"/>
+                <a:ea typeface="Times New Roman" panose="02020603050405020304"/>
+                <a:cs typeface="Times New Roman" panose="02020603050405020304"/>
               </a:endParaRPr>
             </a:p>
             <a:p>
@@ -773,9 +1161,8 @@
                   <a:spcPct val="74000"/>
                 </a:lnSpc>
                 <a:spcBef>
-                  <a:spcPts val="58"/>
+                  <a:spcPts val="60"/>
                 </a:spcBef>
-                <a:tabLst/>
               </a:pPr>
               <a:r>
                 <a:rPr sz="1700" kern="0" spc="10" dirty="0">
@@ -784,27 +1171,26 @@
                       <a:alpha val="100000"/>
                     </a:srgbClr>
                   </a:solidFill>
-                  <a:latin typeface="Arial"/>
-                  <a:ea typeface="Arial"/>
-                  <a:cs typeface="Arial"/>
+                  <a:latin typeface="Arial" panose="020B0604020202020204"/>
+                  <a:ea typeface="Arial" panose="020B0604020202020204"/>
+                  <a:cs typeface="Arial" panose="020B0604020202020204"/>
                 </a:rPr>
                 <a:t>HART</a:t>
               </a:r>
               <a:endParaRPr sz="1700" dirty="0">
-                <a:latin typeface="Arial"/>
-                <a:ea typeface="Arial"/>
-                <a:cs typeface="Arial"/>
+                <a:latin typeface="Arial" panose="020B0604020202020204"/>
+                <a:ea typeface="Arial" panose="020B0604020202020204"/>
+                <a:cs typeface="Arial" panose="020B0604020202020204"/>
               </a:endParaRPr>
             </a:p>
             <a:p>
               <a:pPr algn="r" rtl="0" eaLnBrk="0">
                 <a:lnSpc>
-                  <a:spcPts val="2453"/>
+                  <a:spcPts val="2455"/>
                 </a:lnSpc>
                 <a:spcBef>
-                  <a:spcPts val="91"/>
+                  <a:spcPts val="90"/>
                 </a:spcBef>
-                <a:tabLst/>
               </a:pPr>
               <a:r>
                 <a:rPr sz="1700" kern="0" spc="40" dirty="0">
@@ -813,9 +1199,9 @@
                       <a:alpha val="100000"/>
                     </a:srgbClr>
                   </a:solidFill>
-                  <a:latin typeface="Arial"/>
-                  <a:ea typeface="Arial"/>
-                  <a:cs typeface="Arial"/>
+                  <a:latin typeface="Arial" panose="020B0604020202020204"/>
+                  <a:ea typeface="Arial" panose="020B0604020202020204"/>
+                  <a:cs typeface="Arial" panose="020B0604020202020204"/>
                 </a:rPr>
                 <a:t>dual-stre</a:t>
               </a:r>
@@ -826,16 +1212,16 @@
                       <a:alpha val="100000"/>
                     </a:srgbClr>
                   </a:solidFill>
-                  <a:latin typeface="Arial"/>
-                  <a:ea typeface="Arial"/>
-                  <a:cs typeface="Arial"/>
+                  <a:latin typeface="Arial" panose="020B0604020202020204"/>
+                  <a:ea typeface="Arial" panose="020B0604020202020204"/>
+                  <a:cs typeface="Arial" panose="020B0604020202020204"/>
                 </a:rPr>
                 <a:t>am</a:t>
               </a:r>
               <a:endParaRPr sz="1700" dirty="0">
-                <a:latin typeface="Arial"/>
-                <a:ea typeface="Arial"/>
-                <a:cs typeface="Arial"/>
+                <a:latin typeface="Arial" panose="020B0604020202020204"/>
+                <a:ea typeface="Arial" panose="020B0604020202020204"/>
+                <a:cs typeface="Arial" panose="020B0604020202020204"/>
               </a:endParaRPr>
             </a:p>
           </p:txBody>
@@ -867,14 +1253,13 @@
             <a:p>
               <a:pPr algn="l" rtl="0" eaLnBrk="0">
                 <a:lnSpc>
-                  <a:spcPct val="77045"/>
-                </a:lnSpc>
-                <a:tabLst/>
+                  <a:spcPct val="77000"/>
+                </a:lnSpc>
               </a:pPr>
               <a:endParaRPr sz="100" dirty="0">
-                <a:latin typeface="Arial"/>
-                <a:ea typeface="Arial"/>
-                <a:cs typeface="Arial"/>
+                <a:latin typeface="Arial" panose="020B0604020202020204"/>
+                <a:ea typeface="Arial" panose="020B0604020202020204"/>
+                <a:cs typeface="Arial" panose="020B0604020202020204"/>
               </a:endParaRPr>
             </a:p>
             <a:p>
@@ -882,7 +1267,6 @@
                 <a:lnSpc>
                   <a:spcPct val="76000"/>
                 </a:lnSpc>
-                <a:tabLst/>
               </a:pPr>
               <a:r>
                 <a:rPr sz="1500" kern="0" spc="30" dirty="0">
@@ -891,16 +1275,16 @@
                       <a:alpha val="100000"/>
                     </a:srgbClr>
                   </a:solidFill>
-                  <a:latin typeface="Times New Roman"/>
-                  <a:ea typeface="Times New Roman"/>
-                  <a:cs typeface="Times New Roman"/>
+                  <a:latin typeface="Times New Roman" panose="02020603050405020304"/>
+                  <a:ea typeface="Times New Roman" panose="02020603050405020304"/>
+                  <a:cs typeface="Times New Roman" panose="02020603050405020304"/>
                 </a:rPr>
                 <a:t>MonocularTown</a:t>
               </a:r>
               <a:endParaRPr sz="1500" dirty="0">
-                <a:latin typeface="Times New Roman"/>
-                <a:ea typeface="Times New Roman"/>
-                <a:cs typeface="Times New Roman"/>
+                <a:latin typeface="Times New Roman" panose="02020603050405020304"/>
+                <a:ea typeface="Times New Roman" panose="02020603050405020304"/>
+                <a:cs typeface="Times New Roman" panose="02020603050405020304"/>
               </a:endParaRPr>
             </a:p>
             <a:p>
@@ -909,9 +1293,8 @@
                   <a:spcPct val="94000"/>
                 </a:lnSpc>
                 <a:spcBef>
-                  <a:spcPts val="13"/>
+                  <a:spcPts val="15"/>
                 </a:spcBef>
-                <a:tabLst/>
               </a:pPr>
               <a:r>
                 <a:rPr sz="1500" kern="0" spc="50" dirty="0">
@@ -920,16 +1303,16 @@
                       <a:alpha val="100000"/>
                     </a:srgbClr>
                   </a:solidFill>
-                  <a:latin typeface="Times New Roman"/>
-                  <a:ea typeface="Times New Roman"/>
-                  <a:cs typeface="Times New Roman"/>
+                  <a:latin typeface="Times New Roman" panose="02020603050405020304"/>
+                  <a:ea typeface="Times New Roman" panose="02020603050405020304"/>
+                  <a:cs typeface="Times New Roman" panose="02020603050405020304"/>
                 </a:rPr>
                 <a:t>RGB</a:t>
               </a:r>
               <a:endParaRPr sz="1500" dirty="0">
-                <a:latin typeface="Times New Roman"/>
-                <a:ea typeface="Times New Roman"/>
-                <a:cs typeface="Times New Roman"/>
+                <a:latin typeface="Times New Roman" panose="02020603050405020304"/>
+                <a:ea typeface="Times New Roman" panose="02020603050405020304"/>
+                <a:cs typeface="Times New Roman" panose="02020603050405020304"/>
               </a:endParaRPr>
             </a:p>
             <a:p>
@@ -937,23 +1320,21 @@
                 <a:lnSpc>
                   <a:spcPct val="112000"/>
                 </a:lnSpc>
-                <a:tabLst/>
               </a:pPr>
               <a:endParaRPr sz="800" dirty="0">
-                <a:latin typeface="Arial"/>
-                <a:ea typeface="Arial"/>
-                <a:cs typeface="Arial"/>
-              </a:endParaRPr>
-            </a:p>
-            <a:p>
-              <a:pPr marL="820419" indent="-256540" algn="l" rtl="0" eaLnBrk="0">
+                <a:latin typeface="Arial" panose="020B0604020202020204"/>
+                <a:ea typeface="Arial" panose="020B0604020202020204"/>
+                <a:cs typeface="Arial" panose="020B0604020202020204"/>
+              </a:endParaRPr>
+            </a:p>
+            <a:p>
+              <a:pPr marL="820420" indent="-256540" algn="l" rtl="0" eaLnBrk="0">
                 <a:lnSpc>
                   <a:spcPct val="99000"/>
                 </a:lnSpc>
                 <a:spcBef>
-                  <a:spcPts val="2"/>
+                  <a:spcPts val="0"/>
                 </a:spcBef>
-                <a:tabLst/>
               </a:pPr>
               <a:r>
                 <a:rPr sz="1700" kern="0" spc="30" dirty="0">
@@ -962,9 +1343,9 @@
                       <a:alpha val="100000"/>
                     </a:srgbClr>
                   </a:solidFill>
-                  <a:latin typeface="Arial"/>
-                  <a:ea typeface="Arial"/>
-                  <a:cs typeface="Arial"/>
+                  <a:latin typeface="Arial" panose="020B0604020202020204"/>
+                  <a:ea typeface="Arial" panose="020B0604020202020204"/>
+                  <a:cs typeface="Arial" panose="020B0604020202020204"/>
                 </a:rPr>
                 <a:t>Dorsal stream</a:t>
               </a:r>
@@ -975,9 +1356,9 @@
                       <a:alpha val="100000"/>
                     </a:srgbClr>
                   </a:solidFill>
-                  <a:latin typeface="Arial"/>
-                  <a:ea typeface="Arial"/>
-                  <a:cs typeface="Arial"/>
+                  <a:latin typeface="Arial" panose="020B0604020202020204"/>
+                  <a:ea typeface="Arial" panose="020B0604020202020204"/>
+                  <a:cs typeface="Arial" panose="020B0604020202020204"/>
                 </a:rPr>
                 <a:t> </a:t>
               </a:r>
@@ -988,9 +1369,9 @@
                       <a:alpha val="100000"/>
                     </a:srgbClr>
                   </a:solidFill>
-                  <a:latin typeface="Arial"/>
-                  <a:ea typeface="Arial"/>
-                  <a:cs typeface="Arial"/>
+                  <a:latin typeface="Arial" panose="020B0604020202020204"/>
+                  <a:ea typeface="Arial" panose="020B0604020202020204"/>
+                  <a:cs typeface="Arial" panose="020B0604020202020204"/>
                 </a:rPr>
                 <a:t>(</a:t>
               </a:r>
@@ -1001,9 +1382,9 @@
                       <a:alpha val="100000"/>
                     </a:srgbClr>
                   </a:solidFill>
-                  <a:latin typeface="Arial"/>
-                  <a:ea typeface="Arial"/>
-                  <a:cs typeface="Arial"/>
+                  <a:latin typeface="Arial" panose="020B0604020202020204"/>
+                  <a:ea typeface="Arial" panose="020B0604020202020204"/>
+                  <a:cs typeface="Arial" panose="020B0604020202020204"/>
                 </a:rPr>
                 <a:t>motion</a:t>
               </a:r>
@@ -1014,16 +1395,16 @@
                       <a:alpha val="100000"/>
                     </a:srgbClr>
                   </a:solidFill>
-                  <a:latin typeface="Arial"/>
-                  <a:ea typeface="Arial"/>
-                  <a:cs typeface="Arial"/>
+                  <a:latin typeface="Arial" panose="020B0604020202020204"/>
+                  <a:ea typeface="Arial" panose="020B0604020202020204"/>
+                  <a:cs typeface="Arial" panose="020B0604020202020204"/>
                 </a:rPr>
                 <a:t>)</a:t>
               </a:r>
               <a:endParaRPr sz="1700" dirty="0">
-                <a:latin typeface="Arial"/>
-                <a:ea typeface="Arial"/>
-                <a:cs typeface="Arial"/>
+                <a:latin typeface="Arial" panose="020B0604020202020204"/>
+                <a:ea typeface="Arial" panose="020B0604020202020204"/>
+                <a:cs typeface="Arial" panose="020B0604020202020204"/>
               </a:endParaRPr>
             </a:p>
           </p:txBody>
@@ -1055,14 +1436,13 @@
             <a:p>
               <a:pPr algn="l" rtl="0" eaLnBrk="0">
                 <a:lnSpc>
-                  <a:spcPct val="94162"/>
-                </a:lnSpc>
-                <a:tabLst/>
+                  <a:spcPct val="94000"/>
+                </a:lnSpc>
               </a:pPr>
               <a:endParaRPr sz="100" dirty="0">
-                <a:latin typeface="Arial"/>
-                <a:ea typeface="Arial"/>
-                <a:cs typeface="Arial"/>
+                <a:latin typeface="Arial" panose="020B0604020202020204"/>
+                <a:ea typeface="Arial" panose="020B0604020202020204"/>
+                <a:cs typeface="Arial" panose="020B0604020202020204"/>
               </a:endParaRPr>
             </a:p>
             <a:p>
@@ -1070,7 +1450,6 @@
                 <a:lnSpc>
                   <a:spcPct val="99000"/>
                 </a:lnSpc>
-                <a:tabLst/>
               </a:pPr>
               <a:r>
                 <a:rPr sz="1700" kern="0" spc="30" dirty="0">
@@ -1079,9 +1458,9 @@
                       <a:alpha val="100000"/>
                     </a:srgbClr>
                   </a:solidFill>
-                  <a:latin typeface="Arial"/>
-                  <a:ea typeface="Arial"/>
-                  <a:cs typeface="Arial"/>
+                  <a:latin typeface="Arial" panose="020B0604020202020204"/>
+                  <a:ea typeface="Arial" panose="020B0604020202020204"/>
+                  <a:cs typeface="Arial" panose="020B0604020202020204"/>
                 </a:rPr>
                 <a:t>Ventral stream</a:t>
               </a:r>
@@ -1092,9 +1471,9 @@
                       <a:alpha val="100000"/>
                     </a:srgbClr>
                   </a:solidFill>
-                  <a:latin typeface="Arial"/>
-                  <a:ea typeface="Arial"/>
-                  <a:cs typeface="Arial"/>
+                  <a:latin typeface="Arial" panose="020B0604020202020204"/>
+                  <a:ea typeface="Arial" panose="020B0604020202020204"/>
+                  <a:cs typeface="Arial" panose="020B0604020202020204"/>
                 </a:rPr>
                 <a:t> </a:t>
               </a:r>
@@ -1105,16 +1484,16 @@
                       <a:alpha val="100000"/>
                     </a:srgbClr>
                   </a:solidFill>
-                  <a:latin typeface="Arial"/>
-                  <a:ea typeface="Arial"/>
-                  <a:cs typeface="Arial"/>
+                  <a:latin typeface="Arial" panose="020B0604020202020204"/>
+                  <a:ea typeface="Arial" panose="020B0604020202020204"/>
+                  <a:cs typeface="Arial" panose="020B0604020202020204"/>
                 </a:rPr>
                 <a:t>(appearance)</a:t>
               </a:r>
               <a:endParaRPr sz="1700" dirty="0">
-                <a:latin typeface="Arial"/>
-                <a:ea typeface="Arial"/>
-                <a:cs typeface="Arial"/>
+                <a:latin typeface="Arial" panose="020B0604020202020204"/>
+                <a:ea typeface="Arial" panose="020B0604020202020204"/>
+                <a:cs typeface="Arial" panose="020B0604020202020204"/>
               </a:endParaRPr>
             </a:p>
           </p:txBody>
@@ -1122,7 +1501,7 @@
       </p:grpSp>
       <p:grpSp>
         <p:nvGrpSpPr>
-          <p:cNvPr id="4" name="group 4"/>
+          <p:cNvPr id="5" name="group 4"/>
           <p:cNvGrpSpPr/>
           <p:nvPr/>
         </p:nvGrpSpPr>
@@ -1161,22 +1540,20 @@
             <a:p>
               <a:pPr algn="l" rtl="0" eaLnBrk="0">
                 <a:lnSpc>
-                  <a:spcPct val="74296"/>
-                </a:lnSpc>
-                <a:tabLst/>
+                  <a:spcPct val="74000"/>
+                </a:lnSpc>
               </a:pPr>
               <a:endParaRPr sz="100" dirty="0">
-                <a:latin typeface="Arial"/>
-                <a:ea typeface="Arial"/>
-                <a:cs typeface="Arial"/>
-              </a:endParaRPr>
-            </a:p>
-            <a:p>
-              <a:pPr marL="19684" algn="l" rtl="0" eaLnBrk="0">
+                <a:latin typeface="Arial" panose="020B0604020202020204"/>
+                <a:ea typeface="Arial" panose="020B0604020202020204"/>
+                <a:cs typeface="Arial" panose="020B0604020202020204"/>
+              </a:endParaRPr>
+            </a:p>
+            <a:p>
+              <a:pPr marL="19685" algn="l" rtl="0" eaLnBrk="0">
                 <a:lnSpc>
                   <a:spcPct val="78000"/>
                 </a:lnSpc>
-                <a:tabLst/>
               </a:pPr>
               <a:r>
                 <a:rPr sz="2000" b="1" kern="0" spc="0" dirty="0">
@@ -1185,9 +1562,9 @@
                       <a:alpha val="100000"/>
                     </a:srgbClr>
                   </a:solidFill>
-                  <a:latin typeface="Times New Roman"/>
-                  <a:ea typeface="Times New Roman"/>
-                  <a:cs typeface="Times New Roman"/>
+                  <a:latin typeface="Times New Roman" panose="02020603050405020304"/>
+                  <a:ea typeface="Times New Roman" panose="02020603050405020304"/>
+                  <a:cs typeface="Times New Roman" panose="02020603050405020304"/>
                 </a:rPr>
                 <a:t>Complemen</a:t>
               </a:r>
@@ -1198,16 +1575,16 @@
                       <a:alpha val="100000"/>
                     </a:srgbClr>
                   </a:solidFill>
-                  <a:latin typeface="Times New Roman"/>
-                  <a:ea typeface="Times New Roman"/>
-                  <a:cs typeface="Times New Roman"/>
+                  <a:latin typeface="Times New Roman" panose="02020603050405020304"/>
+                  <a:ea typeface="Times New Roman" panose="02020603050405020304"/>
+                  <a:cs typeface="Times New Roman" panose="02020603050405020304"/>
                 </a:rPr>
                 <a:t>tary Fusion</a:t>
               </a:r>
               <a:endParaRPr sz="2000" dirty="0">
-                <a:latin typeface="Times New Roman"/>
-                <a:ea typeface="Times New Roman"/>
-                <a:cs typeface="Times New Roman"/>
+                <a:latin typeface="Times New Roman" panose="02020603050405020304"/>
+                <a:ea typeface="Times New Roman" panose="02020603050405020304"/>
+                <a:cs typeface="Times New Roman" panose="02020603050405020304"/>
               </a:endParaRPr>
             </a:p>
             <a:p>
@@ -1215,12 +1592,11 @@
                 <a:lnSpc>
                   <a:spcPct val="114000"/>
                 </a:lnSpc>
-                <a:tabLst/>
               </a:pPr>
               <a:endParaRPr sz="1000" dirty="0">
-                <a:latin typeface="Arial"/>
-                <a:ea typeface="Arial"/>
-                <a:cs typeface="Arial"/>
+                <a:latin typeface="Arial" panose="020B0604020202020204"/>
+                <a:ea typeface="Arial" panose="020B0604020202020204"/>
+                <a:cs typeface="Arial" panose="020B0604020202020204"/>
               </a:endParaRPr>
             </a:p>
             <a:p>
@@ -1228,12 +1604,11 @@
                 <a:lnSpc>
                   <a:spcPct val="114000"/>
                 </a:lnSpc>
-                <a:tabLst/>
               </a:pPr>
               <a:endParaRPr sz="1000" dirty="0">
-                <a:latin typeface="Arial"/>
-                <a:ea typeface="Arial"/>
-                <a:cs typeface="Arial"/>
+                <a:latin typeface="Arial" panose="020B0604020202020204"/>
+                <a:ea typeface="Arial" panose="020B0604020202020204"/>
+                <a:cs typeface="Arial" panose="020B0604020202020204"/>
               </a:endParaRPr>
             </a:p>
             <a:p>
@@ -1241,12 +1616,11 @@
                 <a:lnSpc>
                   <a:spcPct val="115000"/>
                 </a:lnSpc>
-                <a:tabLst/>
               </a:pPr>
               <a:endParaRPr sz="1000" dirty="0">
-                <a:latin typeface="Arial"/>
-                <a:ea typeface="Arial"/>
-                <a:cs typeface="Arial"/>
+                <a:latin typeface="Arial" panose="020B0604020202020204"/>
+                <a:ea typeface="Arial" panose="020B0604020202020204"/>
+                <a:cs typeface="Arial" panose="020B0604020202020204"/>
               </a:endParaRPr>
             </a:p>
             <a:p>
@@ -1254,12 +1628,11 @@
                 <a:lnSpc>
                   <a:spcPct val="115000"/>
                 </a:lnSpc>
-                <a:tabLst/>
               </a:pPr>
               <a:endParaRPr sz="1000" dirty="0">
-                <a:latin typeface="Arial"/>
-                <a:ea typeface="Arial"/>
-                <a:cs typeface="Arial"/>
+                <a:latin typeface="Arial" panose="020B0604020202020204"/>
+                <a:ea typeface="Arial" panose="020B0604020202020204"/>
+                <a:cs typeface="Arial" panose="020B0604020202020204"/>
               </a:endParaRPr>
             </a:p>
             <a:p>
@@ -1267,12 +1640,11 @@
                 <a:lnSpc>
                   <a:spcPct val="115000"/>
                 </a:lnSpc>
-                <a:tabLst/>
               </a:pPr>
               <a:endParaRPr sz="1000" dirty="0">
-                <a:latin typeface="Arial"/>
-                <a:ea typeface="Arial"/>
-                <a:cs typeface="Arial"/>
+                <a:latin typeface="Arial" panose="020B0604020202020204"/>
+                <a:ea typeface="Arial" panose="020B0604020202020204"/>
+                <a:cs typeface="Arial" panose="020B0604020202020204"/>
               </a:endParaRPr>
             </a:p>
             <a:p>
@@ -1280,12 +1652,11 @@
                 <a:lnSpc>
                   <a:spcPct val="101000"/>
                 </a:lnSpc>
-                <a:tabLst/>
               </a:pPr>
               <a:endParaRPr sz="500" dirty="0">
-                <a:latin typeface="Arial"/>
-                <a:ea typeface="Arial"/>
-                <a:cs typeface="Arial"/>
+                <a:latin typeface="Arial" panose="020B0604020202020204"/>
+                <a:ea typeface="Arial" panose="020B0604020202020204"/>
+                <a:cs typeface="Arial" panose="020B0604020202020204"/>
               </a:endParaRPr>
             </a:p>
             <a:p>
@@ -1294,9 +1665,8 @@
                   <a:spcPct val="77000"/>
                 </a:lnSpc>
                 <a:spcBef>
-                  <a:spcPts val="3"/>
+                  <a:spcPts val="5"/>
                 </a:spcBef>
-                <a:tabLst/>
               </a:pPr>
               <a:r>
                 <a:rPr sz="2000" b="1" kern="0" spc="0" dirty="0">
@@ -1305,9 +1675,9 @@
                       <a:alpha val="100000"/>
                     </a:srgbClr>
                   </a:solidFill>
-                  <a:latin typeface="Times New Roman"/>
-                  <a:ea typeface="Times New Roman"/>
-                  <a:cs typeface="Times New Roman"/>
+                  <a:latin typeface="Times New Roman" panose="02020603050405020304"/>
+                  <a:ea typeface="Times New Roman" panose="02020603050405020304"/>
+                  <a:cs typeface="Times New Roman" panose="02020603050405020304"/>
                 </a:rPr>
                 <a:t>Hippocampal Spatia</a:t>
               </a:r>
@@ -1318,16 +1688,16 @@
                       <a:alpha val="100000"/>
                     </a:srgbClr>
                   </a:solidFill>
-                  <a:latin typeface="Times New Roman"/>
-                  <a:ea typeface="Times New Roman"/>
-                  <a:cs typeface="Times New Roman"/>
+                  <a:latin typeface="Times New Roman" panose="02020603050405020304"/>
+                  <a:ea typeface="Times New Roman" panose="02020603050405020304"/>
+                  <a:cs typeface="Times New Roman" panose="02020603050405020304"/>
                 </a:rPr>
                 <a:t>l Cells</a:t>
               </a:r>
               <a:endParaRPr sz="2000" dirty="0">
-                <a:latin typeface="Times New Roman"/>
-                <a:ea typeface="Times New Roman"/>
-                <a:cs typeface="Times New Roman"/>
+                <a:latin typeface="Times New Roman" panose="02020603050405020304"/>
+                <a:ea typeface="Times New Roman" panose="02020603050405020304"/>
+                <a:cs typeface="Times New Roman" panose="02020603050405020304"/>
               </a:endParaRPr>
             </a:p>
           </p:txBody>
@@ -1341,7 +1711,7 @@
             <p:nvPr/>
           </p:nvPicPr>
           <p:blipFill>
-            <a:blip r:embed="rId3"/>
+            <a:blip r:embed="rId2"/>
             <a:stretch>
               <a:fillRect/>
             </a:stretch>
@@ -1383,22 +1753,20 @@
             <a:p>
               <a:pPr algn="l" rtl="0" eaLnBrk="0">
                 <a:lnSpc>
-                  <a:spcPct val="83341"/>
-                </a:lnSpc>
-                <a:tabLst/>
+                  <a:spcPct val="83000"/>
+                </a:lnSpc>
               </a:pPr>
               <a:endParaRPr sz="100" dirty="0">
-                <a:latin typeface="Arial"/>
-                <a:ea typeface="Arial"/>
-                <a:cs typeface="Arial"/>
-              </a:endParaRPr>
-            </a:p>
-            <a:p>
-              <a:pPr marL="302259" algn="l" rtl="0" eaLnBrk="0">
-                <a:lnSpc>
-                  <a:spcPts val="2422"/>
-                </a:lnSpc>
-                <a:tabLst/>
+                <a:latin typeface="Arial" panose="020B0604020202020204"/>
+                <a:ea typeface="Arial" panose="020B0604020202020204"/>
+                <a:cs typeface="Arial" panose="020B0604020202020204"/>
+              </a:endParaRPr>
+            </a:p>
+            <a:p>
+              <a:pPr marL="302260" algn="l" rtl="0" eaLnBrk="0">
+                <a:lnSpc>
+                  <a:spcPts val="2420"/>
+                </a:lnSpc>
               </a:pPr>
               <a:r>
                 <a:rPr sz="2000" b="1" kern="0" spc="0" dirty="0">
@@ -1407,9 +1775,9 @@
                       <a:alpha val="100000"/>
                     </a:srgbClr>
                   </a:solidFill>
-                  <a:latin typeface="Microsoft YaHei"/>
-                  <a:ea typeface="Microsoft YaHei"/>
-                  <a:cs typeface="Microsoft YaHei"/>
+                  <a:latin typeface="微软雅黑" panose="020B0503020204020204" charset="-122"/>
+                  <a:ea typeface="微软雅黑" panose="020B0503020204020204" charset="-122"/>
+                  <a:cs typeface="微软雅黑" panose="020B0503020204020204" charset="-122"/>
                 </a:rPr>
                 <a:t>囹</a:t>
               </a:r>
@@ -1420,9 +1788,9 @@
                       <a:alpha val="100000"/>
                     </a:srgbClr>
                   </a:solidFill>
-                  <a:latin typeface="Times New Roman"/>
-                  <a:ea typeface="Times New Roman"/>
-                  <a:cs typeface="Times New Roman"/>
+                  <a:latin typeface="Times New Roman" panose="02020603050405020304"/>
+                  <a:ea typeface="Times New Roman" panose="02020603050405020304"/>
+                  <a:cs typeface="Times New Roman" panose="02020603050405020304"/>
                 </a:rPr>
                 <a:t>Temporal Pro</a:t>
               </a:r>
@@ -1433,16 +1801,16 @@
                       <a:alpha val="100000"/>
                     </a:srgbClr>
                   </a:solidFill>
-                  <a:latin typeface="Times New Roman"/>
-                  <a:ea typeface="Times New Roman"/>
-                  <a:cs typeface="Times New Roman"/>
+                  <a:latin typeface="Times New Roman" panose="02020603050405020304"/>
+                  <a:ea typeface="Times New Roman" panose="02020603050405020304"/>
+                  <a:cs typeface="Times New Roman" panose="02020603050405020304"/>
                 </a:rPr>
                 <a:t>cessing</a:t>
               </a:r>
               <a:endParaRPr sz="2000" dirty="0">
-                <a:latin typeface="Times New Roman"/>
-                <a:ea typeface="Times New Roman"/>
-                <a:cs typeface="Times New Roman"/>
+                <a:latin typeface="Times New Roman" panose="02020603050405020304"/>
+                <a:ea typeface="Times New Roman" panose="02020603050405020304"/>
+                <a:cs typeface="Times New Roman" panose="02020603050405020304"/>
               </a:endParaRPr>
             </a:p>
             <a:p>
@@ -1451,9 +1819,8 @@
                   <a:spcPct val="82000"/>
                 </a:lnSpc>
                 <a:spcBef>
-                  <a:spcPts val="208"/>
+                  <a:spcPts val="210"/>
                 </a:spcBef>
-                <a:tabLst/>
               </a:pPr>
               <a:r>
                 <a:rPr sz="1700" kern="0" spc="40" dirty="0">
@@ -1462,9 +1829,9 @@
                       <a:alpha val="100000"/>
                     </a:srgbClr>
                   </a:solidFill>
-                  <a:latin typeface="Times New Roman"/>
-                  <a:ea typeface="Times New Roman"/>
-                  <a:cs typeface="Times New Roman"/>
+                  <a:latin typeface="Times New Roman" panose="02020603050405020304"/>
+                  <a:ea typeface="Times New Roman" panose="02020603050405020304"/>
+                  <a:cs typeface="Times New Roman" panose="02020603050405020304"/>
                 </a:rPr>
                 <a:t>LSTM</a:t>
               </a:r>
@@ -1475,9 +1842,9 @@
                       <a:alpha val="100000"/>
                     </a:srgbClr>
                   </a:solidFill>
-                  <a:latin typeface="Times New Roman"/>
-                  <a:ea typeface="Times New Roman"/>
-                  <a:cs typeface="Times New Roman"/>
+                  <a:latin typeface="Times New Roman" panose="02020603050405020304"/>
+                  <a:ea typeface="Times New Roman" panose="02020603050405020304"/>
+                  <a:cs typeface="Times New Roman" panose="02020603050405020304"/>
                 </a:rPr>
                 <a:t>                     </a:t>
               </a:r>
@@ -1488,16 +1855,16 @@
                       <a:alpha val="100000"/>
                     </a:srgbClr>
                   </a:solidFill>
-                  <a:latin typeface="Times New Roman"/>
-                  <a:ea typeface="Times New Roman"/>
-                  <a:cs typeface="Times New Roman"/>
+                  <a:latin typeface="Times New Roman" panose="02020603050405020304"/>
+                  <a:ea typeface="Times New Roman" panose="02020603050405020304"/>
+                  <a:cs typeface="Times New Roman" panose="02020603050405020304"/>
                 </a:rPr>
                 <a:t>Lightweight</a:t>
               </a:r>
               <a:endParaRPr sz="1700" dirty="0">
-                <a:latin typeface="Times New Roman"/>
-                <a:ea typeface="Times New Roman"/>
-                <a:cs typeface="Times New Roman"/>
+                <a:latin typeface="Times New Roman" panose="02020603050405020304"/>
+                <a:ea typeface="Times New Roman" panose="02020603050405020304"/>
+                <a:cs typeface="Times New Roman" panose="02020603050405020304"/>
               </a:endParaRPr>
             </a:p>
             <a:p>
@@ -1506,9 +1873,8 @@
                   <a:spcPct val="72000"/>
                 </a:lnSpc>
                 <a:spcBef>
-                  <a:spcPts val="486"/>
+                  <a:spcPts val="485"/>
                 </a:spcBef>
-                <a:tabLst/>
               </a:pPr>
               <a:r>
                 <a:rPr sz="1700" kern="0" spc="40" dirty="0">
@@ -1517,16 +1883,16 @@
                       <a:alpha val="100000"/>
                     </a:srgbClr>
                   </a:solidFill>
-                  <a:latin typeface="Times New Roman"/>
-                  <a:ea typeface="Times New Roman"/>
-                  <a:cs typeface="Times New Roman"/>
+                  <a:latin typeface="Times New Roman" panose="02020603050405020304"/>
+                  <a:ea typeface="Times New Roman" panose="02020603050405020304"/>
+                  <a:cs typeface="Times New Roman" panose="02020603050405020304"/>
                 </a:rPr>
                 <a:t>Fixed - Gate         Attention Module</a:t>
               </a:r>
               <a:endParaRPr sz="1700" dirty="0">
-                <a:latin typeface="Times New Roman"/>
-                <a:ea typeface="Times New Roman"/>
-                <a:cs typeface="Times New Roman"/>
+                <a:latin typeface="Times New Roman" panose="02020603050405020304"/>
+                <a:ea typeface="Times New Roman" panose="02020603050405020304"/>
+                <a:cs typeface="Times New Roman" panose="02020603050405020304"/>
               </a:endParaRPr>
             </a:p>
           </p:txBody>
@@ -1534,7 +1900,7 @@
       </p:grpSp>
       <p:grpSp>
         <p:nvGrpSpPr>
-          <p:cNvPr id="6" name="group 6"/>
+          <p:cNvPr id="7" name="group 6"/>
           <p:cNvGrpSpPr/>
           <p:nvPr/>
         </p:nvGrpSpPr>
@@ -1555,7 +1921,7 @@
             <p:nvPr/>
           </p:nvPicPr>
           <p:blipFill>
-            <a:blip r:embed="rId4"/>
+            <a:blip r:embed="rId3"/>
             <a:stretch>
               <a:fillRect/>
             </a:stretch>
@@ -1597,14 +1963,13 @@
             <a:p>
               <a:pPr algn="l" rtl="0" eaLnBrk="0">
                 <a:lnSpc>
-                  <a:spcPct val="88906"/>
-                </a:lnSpc>
-                <a:tabLst/>
+                  <a:spcPct val="89000"/>
+                </a:lnSpc>
               </a:pPr>
               <a:endParaRPr sz="100" dirty="0">
-                <a:latin typeface="Arial"/>
-                <a:ea typeface="Arial"/>
-                <a:cs typeface="Arial"/>
+                <a:latin typeface="Arial" panose="020B0604020202020204"/>
+                <a:ea typeface="Arial" panose="020B0604020202020204"/>
+                <a:cs typeface="Arial" panose="020B0604020202020204"/>
               </a:endParaRPr>
             </a:p>
             <a:p>
@@ -1612,7 +1977,6 @@
                 <a:lnSpc>
                   <a:spcPct val="75000"/>
                 </a:lnSpc>
-                <a:tabLst/>
               </a:pPr>
               <a:r>
                 <a:rPr sz="2000" b="1" kern="0" spc="0" dirty="0">
@@ -1621,9 +1985,9 @@
                       <a:alpha val="100000"/>
                     </a:srgbClr>
                   </a:solidFill>
-                  <a:latin typeface="Times New Roman"/>
-                  <a:ea typeface="Times New Roman"/>
-                  <a:cs typeface="Times New Roman"/>
+                  <a:latin typeface="Times New Roman" panose="02020603050405020304"/>
+                  <a:ea typeface="Times New Roman" panose="02020603050405020304"/>
+                  <a:cs typeface="Times New Roman" panose="02020603050405020304"/>
                 </a:rPr>
                 <a:t>Location&amp;</a:t>
               </a:r>
@@ -1634,24 +1998,23 @@
                       <a:alpha val="100000"/>
                     </a:srgbClr>
                   </a:solidFill>
-                  <a:latin typeface="Times New Roman"/>
-                  <a:ea typeface="Times New Roman"/>
-                  <a:cs typeface="Times New Roman"/>
+                  <a:latin typeface="Times New Roman" panose="02020603050405020304"/>
+                  <a:ea typeface="Times New Roman" panose="02020603050405020304"/>
+                  <a:cs typeface="Times New Roman" panose="02020603050405020304"/>
                 </a:rPr>
                 <a:t>mappin</a:t>
               </a:r>
               <a:endParaRPr sz="2000" dirty="0">
-                <a:latin typeface="Times New Roman"/>
-                <a:ea typeface="Times New Roman"/>
-                <a:cs typeface="Times New Roman"/>
+                <a:latin typeface="Times New Roman" panose="02020603050405020304"/>
+                <a:ea typeface="Times New Roman" panose="02020603050405020304"/>
+                <a:cs typeface="Times New Roman" panose="02020603050405020304"/>
               </a:endParaRPr>
             </a:p>
             <a:p>
               <a:pPr marL="17145" algn="l" rtl="0" eaLnBrk="0">
                 <a:lnSpc>
-                  <a:spcPts val="2452"/>
-                </a:lnSpc>
-                <a:tabLst/>
+                  <a:spcPts val="2450"/>
+                </a:lnSpc>
               </a:pPr>
               <a:r>
                 <a:rPr sz="2000" b="1" kern="0" spc="-10" dirty="0">
@@ -1660,16 +2023,16 @@
                       <a:alpha val="100000"/>
                     </a:srgbClr>
                   </a:solidFill>
-                  <a:latin typeface="Times New Roman"/>
-                  <a:ea typeface="Times New Roman"/>
-                  <a:cs typeface="Times New Roman"/>
+                  <a:latin typeface="Times New Roman" panose="02020603050405020304"/>
+                  <a:ea typeface="Times New Roman" panose="02020603050405020304"/>
+                  <a:cs typeface="Times New Roman" panose="02020603050405020304"/>
                 </a:rPr>
                 <a:t>g</a:t>
               </a:r>
               <a:endParaRPr sz="2000" dirty="0">
-                <a:latin typeface="Times New Roman"/>
-                <a:ea typeface="Times New Roman"/>
-                <a:cs typeface="Times New Roman"/>
+                <a:latin typeface="Times New Roman" panose="02020603050405020304"/>
+                <a:ea typeface="Times New Roman" panose="02020603050405020304"/>
+                <a:cs typeface="Times New Roman" panose="02020603050405020304"/>
               </a:endParaRPr>
             </a:p>
           </p:txBody>
@@ -1701,14 +2064,13 @@
             <a:p>
               <a:pPr algn="l" rtl="0" eaLnBrk="0">
                 <a:lnSpc>
-                  <a:spcPct val="87849"/>
-                </a:lnSpc>
-                <a:tabLst/>
+                  <a:spcPct val="88000"/>
+                </a:lnSpc>
               </a:pPr>
               <a:endParaRPr sz="100" dirty="0">
-                <a:latin typeface="Arial"/>
-                <a:ea typeface="Arial"/>
-                <a:cs typeface="Arial"/>
+                <a:latin typeface="Arial" panose="020B0604020202020204"/>
+                <a:ea typeface="Arial" panose="020B0604020202020204"/>
+                <a:cs typeface="Arial" panose="020B0604020202020204"/>
               </a:endParaRPr>
             </a:p>
             <a:p>
@@ -1716,7 +2078,6 @@
                 <a:lnSpc>
                   <a:spcPct val="78000"/>
                 </a:lnSpc>
-                <a:tabLst/>
               </a:pPr>
               <a:r>
                 <a:rPr sz="2000" kern="0" spc="-10" dirty="0">
@@ -1725,16 +2086,16 @@
                       <a:alpha val="100000"/>
                     </a:srgbClr>
                   </a:solidFill>
-                  <a:latin typeface="Times New Roman"/>
-                  <a:ea typeface="Times New Roman"/>
-                  <a:cs typeface="Times New Roman"/>
+                  <a:latin typeface="Times New Roman" panose="02020603050405020304"/>
+                  <a:ea typeface="Times New Roman" panose="02020603050405020304"/>
+                  <a:cs typeface="Times New Roman" panose="02020603050405020304"/>
                 </a:rPr>
                 <a:t>experience map</a:t>
               </a:r>
               <a:endParaRPr sz="2000" dirty="0">
-                <a:latin typeface="Times New Roman"/>
-                <a:ea typeface="Times New Roman"/>
-                <a:cs typeface="Times New Roman"/>
+                <a:latin typeface="Times New Roman" panose="02020603050405020304"/>
+                <a:ea typeface="Times New Roman" panose="02020603050405020304"/>
+                <a:cs typeface="Times New Roman" panose="02020603050405020304"/>
               </a:endParaRPr>
             </a:p>
           </p:txBody>
@@ -1749,7 +2110,7 @@
           <p:nvPr/>
         </p:nvPicPr>
         <p:blipFill>
-          <a:blip r:embed="rId5"/>
+          <a:blip r:embed="rId4"/>
           <a:stretch>
             <a:fillRect/>
           </a:stretch>
@@ -1791,22 +2152,20 @@
           <a:p>
             <a:pPr algn="l" rtl="0" eaLnBrk="0">
               <a:lnSpc>
-                <a:spcPct val="95756"/>
+                <a:spcPct val="96000"/>
               </a:lnSpc>
-              <a:tabLst/>
             </a:pPr>
             <a:endParaRPr sz="100" dirty="0">
-              <a:latin typeface="Arial"/>
-              <a:ea typeface="Arial"/>
-              <a:cs typeface="Arial"/>
+              <a:latin typeface="Arial" panose="020B0604020202020204"/>
+              <a:ea typeface="Arial" panose="020B0604020202020204"/>
+              <a:cs typeface="Arial" panose="020B0604020202020204"/>
             </a:endParaRPr>
           </a:p>
           <a:p>
-            <a:pPr marL="728344" algn="l" rtl="0" eaLnBrk="0">
+            <a:pPr marL="728345" algn="l" rtl="0" eaLnBrk="0">
               <a:lnSpc>
                 <a:spcPct val="83000"/>
               </a:lnSpc>
-              <a:tabLst/>
             </a:pPr>
             <a:r>
               <a:rPr sz="3200" b="1" kern="0" spc="760" dirty="0">
@@ -1815,16 +2174,16 @@
                     <a:alpha val="100000"/>
                   </a:srgbClr>
                 </a:solidFill>
-                <a:latin typeface="SimSun"/>
-                <a:ea typeface="SimSun"/>
-                <a:cs typeface="SimSun"/>
+                <a:latin typeface="宋体" panose="02010600030101010101" pitchFamily="2" charset="-122"/>
+                <a:ea typeface="宋体" panose="02010600030101010101" pitchFamily="2" charset="-122"/>
+                <a:cs typeface="宋体" panose="02010600030101010101" pitchFamily="2" charset="-122"/>
               </a:rPr>
               <a:t>+</a:t>
             </a:r>
             <a:endParaRPr sz="3200" dirty="0">
-              <a:latin typeface="SimSun"/>
-              <a:ea typeface="SimSun"/>
-              <a:cs typeface="SimSun"/>
+              <a:latin typeface="宋体" panose="02010600030101010101" pitchFamily="2" charset="-122"/>
+              <a:ea typeface="宋体" panose="02010600030101010101" pitchFamily="2" charset="-122"/>
+              <a:cs typeface="宋体" panose="02010600030101010101" pitchFamily="2" charset="-122"/>
             </a:endParaRPr>
           </a:p>
           <a:p>
@@ -1832,34 +2191,32 @@
               <a:lnSpc>
                 <a:spcPct val="101000"/>
               </a:lnSpc>
-              <a:tabLst/>
             </a:pPr>
             <a:endParaRPr sz="1000" dirty="0">
-              <a:latin typeface="Arial"/>
-              <a:ea typeface="Arial"/>
-              <a:cs typeface="Arial"/>
+              <a:latin typeface="Arial" panose="020B0604020202020204"/>
+              <a:ea typeface="Arial" panose="020B0604020202020204"/>
+              <a:cs typeface="Arial" panose="020B0604020202020204"/>
             </a:endParaRPr>
           </a:p>
           <a:p>
             <a:pPr marL="12700" algn="l" rtl="0" eaLnBrk="0">
               <a:lnSpc>
-                <a:spcPts val="2604"/>
+                <a:spcPts val="2605"/>
               </a:lnSpc>
               <a:spcBef>
-                <a:spcPts val="2"/>
+                <a:spcPts val="0"/>
               </a:spcBef>
-              <a:tabLst/>
             </a:pPr>
             <a:r>
-              <a:rPr sz="2700" kern="0" spc="0" baseline="31305" dirty="0">
+              <a:rPr sz="2700" kern="0" spc="0" baseline="31000" dirty="0">
                 <a:solidFill>
                   <a:srgbClr val="000000">
                     <a:alpha val="100000"/>
                   </a:srgbClr>
                 </a:solidFill>
-                <a:latin typeface="Times New Roman"/>
-                <a:ea typeface="Times New Roman"/>
-                <a:cs typeface="Times New Roman"/>
+                <a:latin typeface="Times New Roman" panose="02020603050405020304"/>
+                <a:ea typeface="Times New Roman" panose="02020603050405020304"/>
+                <a:cs typeface="Times New Roman" panose="02020603050405020304"/>
               </a:rPr>
               <a:t>Hd</a:t>
             </a:r>
@@ -1870,22 +2227,22 @@
                     <a:alpha val="100000"/>
                   </a:srgbClr>
                 </a:solidFill>
-                <a:latin typeface="Times New Roman"/>
-                <a:ea typeface="Times New Roman"/>
-                <a:cs typeface="Times New Roman"/>
+                <a:latin typeface="Times New Roman" panose="02020603050405020304"/>
+                <a:ea typeface="Times New Roman" panose="02020603050405020304"/>
+                <a:cs typeface="Times New Roman" panose="02020603050405020304"/>
               </a:rPr>
               <a:t> </a:t>
             </a:r>
             <a:r>
-              <a:rPr sz="2700" kern="0" spc="20" baseline="-3419" dirty="0">
+              <a:rPr sz="2700" kern="0" spc="20" baseline="-3000" dirty="0">
                 <a:solidFill>
                   <a:srgbClr val="000000">
                     <a:alpha val="100000"/>
                   </a:srgbClr>
                 </a:solidFill>
-                <a:latin typeface="Times New Roman"/>
-                <a:ea typeface="Times New Roman"/>
-                <a:cs typeface="Times New Roman"/>
+                <a:latin typeface="Times New Roman" panose="02020603050405020304"/>
+                <a:ea typeface="Times New Roman" panose="02020603050405020304"/>
+                <a:cs typeface="Times New Roman" panose="02020603050405020304"/>
               </a:rPr>
               <a:t>,</a:t>
             </a:r>
@@ -1896,22 +2253,22 @@
                     <a:alpha val="100000"/>
                   </a:srgbClr>
                 </a:solidFill>
-                <a:latin typeface="Times New Roman"/>
-                <a:ea typeface="Times New Roman"/>
-                <a:cs typeface="Times New Roman"/>
+                <a:latin typeface="Times New Roman" panose="02020603050405020304"/>
+                <a:ea typeface="Times New Roman" panose="02020603050405020304"/>
+                <a:cs typeface="Times New Roman" panose="02020603050405020304"/>
               </a:rPr>
               <a:t> </a:t>
             </a:r>
             <a:r>
-              <a:rPr sz="2700" kern="0" spc="20" baseline="-3419" dirty="0">
+              <a:rPr sz="2700" kern="0" spc="20" baseline="-3000" dirty="0">
                 <a:solidFill>
                   <a:srgbClr val="000000">
                     <a:alpha val="100000"/>
                   </a:srgbClr>
                 </a:solidFill>
-                <a:latin typeface="Times New Roman"/>
-                <a:ea typeface="Times New Roman"/>
-                <a:cs typeface="Times New Roman"/>
+                <a:latin typeface="Times New Roman" panose="02020603050405020304"/>
+                <a:ea typeface="Times New Roman" panose="02020603050405020304"/>
+                <a:cs typeface="Times New Roman" panose="02020603050405020304"/>
               </a:rPr>
               <a:t>y,</a:t>
             </a:r>
@@ -1922,22 +2279,22 @@
                     <a:alpha val="100000"/>
                   </a:srgbClr>
                 </a:solidFill>
-                <a:latin typeface="Times New Roman"/>
-                <a:ea typeface="Times New Roman"/>
-                <a:cs typeface="Times New Roman"/>
+                <a:latin typeface="Times New Roman" panose="02020603050405020304"/>
+                <a:ea typeface="Times New Roman" panose="02020603050405020304"/>
+                <a:cs typeface="Times New Roman" panose="02020603050405020304"/>
               </a:rPr>
               <a:t> </a:t>
             </a:r>
             <a:r>
-              <a:rPr sz="2700" kern="0" spc="20" baseline="-3419" dirty="0">
+              <a:rPr sz="2700" kern="0" spc="20" baseline="-3000" dirty="0">
                 <a:solidFill>
                   <a:srgbClr val="000000">
                     <a:alpha val="100000"/>
                   </a:srgbClr>
                 </a:solidFill>
-                <a:latin typeface="Times New Roman"/>
-                <a:ea typeface="Times New Roman"/>
-                <a:cs typeface="Times New Roman"/>
+                <a:latin typeface="Times New Roman" panose="02020603050405020304"/>
+                <a:ea typeface="Times New Roman" panose="02020603050405020304"/>
+                <a:cs typeface="Times New Roman" panose="02020603050405020304"/>
               </a:rPr>
               <a:t>z</a:t>
             </a:r>
@@ -1948,35 +2305,35 @@
                     <a:alpha val="100000"/>
                   </a:srgbClr>
                 </a:solidFill>
-                <a:latin typeface="Times New Roman"/>
-                <a:ea typeface="Times New Roman"/>
-                <a:cs typeface="Times New Roman"/>
+                <a:latin typeface="Times New Roman" panose="02020603050405020304"/>
+                <a:ea typeface="Times New Roman" panose="02020603050405020304"/>
+                <a:cs typeface="Times New Roman" panose="02020603050405020304"/>
               </a:rPr>
               <a:t>    </a:t>
             </a:r>
             <a:r>
-              <a:rPr sz="2700" kern="0" spc="20" baseline="31305" dirty="0">
+              <a:rPr sz="2700" kern="0" spc="20" baseline="31000" dirty="0">
                 <a:solidFill>
                   <a:srgbClr val="000000">
                     <a:alpha val="100000"/>
                   </a:srgbClr>
                 </a:solidFill>
-                <a:latin typeface="Times New Roman"/>
-                <a:ea typeface="Times New Roman"/>
-                <a:cs typeface="Times New Roman"/>
+                <a:latin typeface="Times New Roman" panose="02020603050405020304"/>
+                <a:ea typeface="Times New Roman" panose="02020603050405020304"/>
+                <a:cs typeface="Times New Roman" panose="02020603050405020304"/>
               </a:rPr>
               <a:t>3</a:t>
             </a:r>
             <a:r>
-              <a:rPr sz="2700" kern="0" spc="0" baseline="31305" dirty="0">
+              <a:rPr sz="2700" kern="0" spc="0" baseline="31000" dirty="0">
                 <a:solidFill>
                   <a:srgbClr val="000000">
                     <a:alpha val="100000"/>
                   </a:srgbClr>
                 </a:solidFill>
-                <a:latin typeface="Times New Roman"/>
-                <a:ea typeface="Times New Roman"/>
-                <a:cs typeface="Times New Roman"/>
+                <a:latin typeface="Times New Roman" panose="02020603050405020304"/>
+                <a:ea typeface="Times New Roman" panose="02020603050405020304"/>
+                <a:cs typeface="Times New Roman" panose="02020603050405020304"/>
               </a:rPr>
               <a:t>D</a:t>
             </a:r>
@@ -1987,22 +2344,22 @@
                     <a:alpha val="100000"/>
                   </a:srgbClr>
                 </a:solidFill>
-                <a:latin typeface="Times New Roman"/>
-                <a:ea typeface="Times New Roman"/>
-                <a:cs typeface="Times New Roman"/>
+                <a:latin typeface="Times New Roman" panose="02020603050405020304"/>
+                <a:ea typeface="Times New Roman" panose="02020603050405020304"/>
+                <a:cs typeface="Times New Roman" panose="02020603050405020304"/>
               </a:rPr>
               <a:t> </a:t>
             </a:r>
             <a:r>
-              <a:rPr sz="2700" kern="0" spc="0" baseline="31305" dirty="0">
+              <a:rPr sz="2700" kern="0" spc="0" baseline="31000" dirty="0">
                 <a:solidFill>
                   <a:srgbClr val="000000">
                     <a:alpha val="100000"/>
                   </a:srgbClr>
                 </a:solidFill>
-                <a:latin typeface="Times New Roman"/>
-                <a:ea typeface="Times New Roman"/>
-                <a:cs typeface="Times New Roman"/>
+                <a:latin typeface="Times New Roman" panose="02020603050405020304"/>
+                <a:ea typeface="Times New Roman" panose="02020603050405020304"/>
+                <a:cs typeface="Times New Roman" panose="02020603050405020304"/>
               </a:rPr>
               <a:t>gr</a:t>
             </a:r>
@@ -2013,22 +2370,22 @@
                     <a:alpha val="100000"/>
                   </a:srgbClr>
                 </a:solidFill>
-                <a:latin typeface="Times New Roman"/>
-                <a:ea typeface="Times New Roman"/>
-                <a:cs typeface="Times New Roman"/>
+                <a:latin typeface="Times New Roman" panose="02020603050405020304"/>
+                <a:ea typeface="Times New Roman" panose="02020603050405020304"/>
+                <a:cs typeface="Times New Roman" panose="02020603050405020304"/>
               </a:rPr>
               <a:t>    </a:t>
             </a:r>
             <a:r>
-              <a:rPr sz="2700" kern="0" spc="0" baseline="31305" dirty="0">
+              <a:rPr sz="2700" kern="0" spc="0" baseline="31000" dirty="0">
                 <a:solidFill>
                   <a:srgbClr val="000000">
                     <a:alpha val="100000"/>
                   </a:srgbClr>
                 </a:solidFill>
-                <a:latin typeface="Times New Roman"/>
-                <a:ea typeface="Times New Roman"/>
-                <a:cs typeface="Times New Roman"/>
+                <a:latin typeface="Times New Roman" panose="02020603050405020304"/>
+                <a:ea typeface="Times New Roman" panose="02020603050405020304"/>
+                <a:cs typeface="Times New Roman" panose="02020603050405020304"/>
               </a:rPr>
               <a:t>cell</a:t>
             </a:r>
@@ -2039,9 +2396,9 @@
                     <a:alpha val="100000"/>
                   </a:srgbClr>
                 </a:solidFill>
-                <a:latin typeface="Times New Roman"/>
-                <a:ea typeface="Times New Roman"/>
-                <a:cs typeface="Times New Roman"/>
+                <a:latin typeface="Times New Roman" panose="02020603050405020304"/>
+                <a:ea typeface="Times New Roman" panose="02020603050405020304"/>
+                <a:cs typeface="Times New Roman" panose="02020603050405020304"/>
               </a:rPr>
               <a:t>       </a:t>
             </a:r>
@@ -2052,9 +2409,9 @@
                     <a:alpha val="100000"/>
                   </a:srgbClr>
                 </a:solidFill>
-                <a:latin typeface="Times New Roman"/>
-                <a:ea typeface="Times New Roman"/>
-                <a:cs typeface="Times New Roman"/>
+                <a:latin typeface="Times New Roman" panose="02020603050405020304"/>
+                <a:ea typeface="Times New Roman" panose="02020603050405020304"/>
+                <a:cs typeface="Times New Roman" panose="02020603050405020304"/>
               </a:rPr>
               <a:t>4</a:t>
             </a:r>
@@ -2065,9 +2422,9 @@
                     <a:alpha val="100000"/>
                   </a:srgbClr>
                 </a:solidFill>
-                <a:latin typeface="Times New Roman"/>
-                <a:ea typeface="Times New Roman"/>
-                <a:cs typeface="Times New Roman"/>
+                <a:latin typeface="Times New Roman" panose="02020603050405020304"/>
+                <a:ea typeface="Times New Roman" panose="02020603050405020304"/>
+                <a:cs typeface="Times New Roman" panose="02020603050405020304"/>
               </a:rPr>
               <a:t>DoF</a:t>
             </a:r>
@@ -2078,9 +2435,9 @@
                     <a:alpha val="100000"/>
                   </a:srgbClr>
                 </a:solidFill>
-                <a:latin typeface="Times New Roman"/>
-                <a:ea typeface="Times New Roman"/>
-                <a:cs typeface="Times New Roman"/>
+                <a:latin typeface="Times New Roman" panose="02020603050405020304"/>
+                <a:ea typeface="Times New Roman" panose="02020603050405020304"/>
+                <a:cs typeface="Times New Roman" panose="02020603050405020304"/>
               </a:rPr>
               <a:t> </a:t>
             </a:r>
@@ -2091,9 +2448,9 @@
                     <a:alpha val="100000"/>
                   </a:srgbClr>
                 </a:solidFill>
-                <a:latin typeface="Times New Roman"/>
-                <a:ea typeface="Times New Roman"/>
-                <a:cs typeface="Times New Roman"/>
+                <a:latin typeface="Times New Roman" panose="02020603050405020304"/>
+                <a:ea typeface="Times New Roman" panose="02020603050405020304"/>
+                <a:cs typeface="Times New Roman" panose="02020603050405020304"/>
               </a:rPr>
               <a:t>  </a:t>
             </a:r>
@@ -2104,16 +2461,16 @@
                     <a:alpha val="100000"/>
                   </a:srgbClr>
                 </a:solidFill>
-                <a:latin typeface="Times New Roman"/>
-                <a:ea typeface="Times New Roman"/>
-                <a:cs typeface="Times New Roman"/>
+                <a:latin typeface="Times New Roman" panose="02020603050405020304"/>
+                <a:ea typeface="Times New Roman" panose="02020603050405020304"/>
+                <a:cs typeface="Times New Roman" panose="02020603050405020304"/>
               </a:rPr>
               <a:t>pose</a:t>
             </a:r>
             <a:endParaRPr sz="1700" dirty="0">
-              <a:latin typeface="Times New Roman"/>
-              <a:ea typeface="Times New Roman"/>
-              <a:cs typeface="Times New Roman"/>
+              <a:latin typeface="Times New Roman" panose="02020603050405020304"/>
+              <a:ea typeface="Times New Roman" panose="02020603050405020304"/>
+              <a:cs typeface="Times New Roman" panose="02020603050405020304"/>
             </a:endParaRPr>
           </a:p>
         </p:txBody>
@@ -2145,22 +2502,20 @@
           <a:p>
             <a:pPr algn="l" rtl="0" eaLnBrk="0">
               <a:lnSpc>
-                <a:spcPct val="83341"/>
+                <a:spcPct val="83000"/>
               </a:lnSpc>
-              <a:tabLst/>
             </a:pPr>
             <a:endParaRPr sz="100" dirty="0">
-              <a:latin typeface="Arial"/>
-              <a:ea typeface="Arial"/>
-              <a:cs typeface="Arial"/>
+              <a:latin typeface="Arial" panose="020B0604020202020204"/>
+              <a:ea typeface="Arial" panose="020B0604020202020204"/>
+              <a:cs typeface="Arial" panose="020B0604020202020204"/>
             </a:endParaRPr>
           </a:p>
           <a:p>
             <a:pPr marL="12700" algn="l" rtl="0" eaLnBrk="0">
               <a:lnSpc>
-                <a:spcPts val="1306"/>
+                <a:spcPts val="1305"/>
               </a:lnSpc>
-              <a:tabLst/>
             </a:pPr>
             <a:r>
               <a:rPr sz="1700" kern="0" spc="20" dirty="0">
@@ -2169,16 +2524,16 @@
                     <a:alpha val="100000"/>
                   </a:srgbClr>
                 </a:solidFill>
-                <a:latin typeface="Times New Roman"/>
-                <a:ea typeface="Times New Roman"/>
-                <a:cs typeface="Times New Roman"/>
+                <a:latin typeface="Times New Roman" panose="02020603050405020304"/>
+                <a:ea typeface="Times New Roman" panose="02020603050405020304"/>
+                <a:cs typeface="Times New Roman" panose="02020603050405020304"/>
               </a:rPr>
               <a:t>ψ</a:t>
             </a:r>
             <a:endParaRPr sz="1700" dirty="0">
-              <a:latin typeface="Times New Roman"/>
-              <a:ea typeface="Times New Roman"/>
-              <a:cs typeface="Times New Roman"/>
+              <a:latin typeface="Times New Roman" panose="02020603050405020304"/>
+              <a:ea typeface="Times New Roman" panose="02020603050405020304"/>
+              <a:cs typeface="Times New Roman" panose="02020603050405020304"/>
             </a:endParaRPr>
           </a:p>
         </p:txBody>
@@ -2210,14 +2565,13 @@
           <a:p>
             <a:pPr algn="l" rtl="0" eaLnBrk="0">
               <a:lnSpc>
-                <a:spcPct val="87943"/>
+                <a:spcPct val="88000"/>
               </a:lnSpc>
-              <a:tabLst/>
             </a:pPr>
             <a:endParaRPr sz="100" dirty="0">
-              <a:latin typeface="Arial"/>
-              <a:ea typeface="Arial"/>
-              <a:cs typeface="Arial"/>
+              <a:latin typeface="Arial" panose="020B0604020202020204"/>
+              <a:ea typeface="Arial" panose="020B0604020202020204"/>
+              <a:cs typeface="Arial" panose="020B0604020202020204"/>
             </a:endParaRPr>
           </a:p>
           <a:p>
@@ -2225,7 +2579,6 @@
               <a:lnSpc>
                 <a:spcPct val="63000"/>
               </a:lnSpc>
-              <a:tabLst/>
             </a:pPr>
             <a:r>
               <a:rPr sz="1700" kern="0" spc="0" dirty="0">
@@ -2234,16 +2587,16 @@
                     <a:alpha val="100000"/>
                   </a:srgbClr>
                 </a:solidFill>
-                <a:latin typeface="Times New Roman"/>
-                <a:ea typeface="Times New Roman"/>
-                <a:cs typeface="Times New Roman"/>
+                <a:latin typeface="Times New Roman" panose="02020603050405020304"/>
+                <a:ea typeface="Times New Roman" panose="02020603050405020304"/>
+                <a:cs typeface="Times New Roman" panose="02020603050405020304"/>
               </a:rPr>
               <a:t>id</a:t>
             </a:r>
             <a:endParaRPr sz="1700" dirty="0">
-              <a:latin typeface="Times New Roman"/>
-              <a:ea typeface="Times New Roman"/>
-              <a:cs typeface="Times New Roman"/>
+              <a:latin typeface="Times New Roman" panose="02020603050405020304"/>
+              <a:ea typeface="Times New Roman" panose="02020603050405020304"/>
+              <a:cs typeface="Times New Roman" panose="02020603050405020304"/>
             </a:endParaRPr>
           </a:p>
         </p:txBody>
@@ -2275,22 +2628,20 @@
           <a:p>
             <a:pPr algn="l" rtl="0" eaLnBrk="0">
               <a:lnSpc>
-                <a:spcPct val="83341"/>
+                <a:spcPct val="83000"/>
               </a:lnSpc>
-              <a:tabLst/>
             </a:pPr>
             <a:endParaRPr sz="100" dirty="0">
-              <a:latin typeface="Arial"/>
-              <a:ea typeface="Arial"/>
-              <a:cs typeface="Arial"/>
+              <a:latin typeface="Arial" panose="020B0604020202020204"/>
+              <a:ea typeface="Arial" panose="020B0604020202020204"/>
+              <a:cs typeface="Arial" panose="020B0604020202020204"/>
             </a:endParaRPr>
           </a:p>
           <a:p>
             <a:pPr marL="12700" algn="l" rtl="0" eaLnBrk="0">
               <a:lnSpc>
-                <a:spcPts val="966"/>
+                <a:spcPts val="965"/>
               </a:lnSpc>
-              <a:tabLst/>
             </a:pPr>
             <a:r>
               <a:rPr sz="1700" kern="0" spc="10" dirty="0">
@@ -2299,16 +2650,16 @@
                     <a:alpha val="100000"/>
                   </a:srgbClr>
                 </a:solidFill>
-                <a:latin typeface="Times New Roman"/>
-                <a:ea typeface="Times New Roman"/>
-                <a:cs typeface="Times New Roman"/>
+                <a:latin typeface="Times New Roman" panose="02020603050405020304"/>
+                <a:ea typeface="Times New Roman" panose="02020603050405020304"/>
+                <a:cs typeface="Times New Roman" panose="02020603050405020304"/>
               </a:rPr>
               <a:t>x</a:t>
             </a:r>
             <a:endParaRPr sz="1700" dirty="0">
-              <a:latin typeface="Times New Roman"/>
-              <a:ea typeface="Times New Roman"/>
-              <a:cs typeface="Times New Roman"/>
+              <a:latin typeface="Times New Roman" panose="02020603050405020304"/>
+              <a:ea typeface="Times New Roman" panose="02020603050405020304"/>
+              <a:cs typeface="Times New Roman" panose="02020603050405020304"/>
             </a:endParaRPr>
           </a:p>
         </p:txBody>
@@ -2340,22 +2691,20 @@
           <a:p>
             <a:pPr algn="l" rtl="0" eaLnBrk="0">
               <a:lnSpc>
-                <a:spcPct val="83341"/>
+                <a:spcPct val="83000"/>
               </a:lnSpc>
-              <a:tabLst/>
             </a:pPr>
             <a:endParaRPr sz="100" dirty="0">
-              <a:latin typeface="Arial"/>
-              <a:ea typeface="Arial"/>
-              <a:cs typeface="Arial"/>
+              <a:latin typeface="Arial" panose="020B0604020202020204"/>
+              <a:ea typeface="Arial" panose="020B0604020202020204"/>
+              <a:cs typeface="Arial" panose="020B0604020202020204"/>
             </a:endParaRPr>
           </a:p>
           <a:p>
             <a:pPr marL="12700" algn="l" rtl="0" eaLnBrk="0">
               <a:lnSpc>
-                <a:spcPts val="1003"/>
+                <a:spcPts val="1005"/>
               </a:lnSpc>
-              <a:tabLst/>
             </a:pPr>
             <a:r>
               <a:rPr sz="1700" kern="0" spc="-20" dirty="0">
@@ -2364,16 +2713,16 @@
                     <a:alpha val="100000"/>
                   </a:srgbClr>
                 </a:solidFill>
-                <a:latin typeface="Times New Roman"/>
-                <a:ea typeface="Times New Roman"/>
-                <a:cs typeface="Times New Roman"/>
+                <a:latin typeface="Times New Roman" panose="02020603050405020304"/>
+                <a:ea typeface="Times New Roman" panose="02020603050405020304"/>
+                <a:cs typeface="Times New Roman" panose="02020603050405020304"/>
               </a:rPr>
               <a:t>c</a:t>
             </a:r>
             <a:endParaRPr sz="1700" dirty="0">
-              <a:latin typeface="Times New Roman"/>
-              <a:ea typeface="Times New Roman"/>
-              <a:cs typeface="Times New Roman"/>
+              <a:latin typeface="Times New Roman" panose="02020603050405020304"/>
+              <a:ea typeface="Times New Roman" panose="02020603050405020304"/>
+              <a:cs typeface="Times New Roman" panose="02020603050405020304"/>
             </a:endParaRPr>
           </a:p>
         </p:txBody>
@@ -2387,7 +2736,7 @@
           <p:nvPr/>
         </p:nvPicPr>
         <p:blipFill>
-          <a:blip r:embed="rId6"/>
+          <a:blip r:embed="rId5"/>
           <a:stretch>
             <a:fillRect/>
           </a:stretch>
@@ -2429,14 +2778,13 @@
           <a:p>
             <a:pPr algn="l" rtl="0" eaLnBrk="0">
               <a:lnSpc>
-                <a:spcPct val="86579"/>
+                <a:spcPct val="87000"/>
               </a:lnSpc>
-              <a:tabLst/>
             </a:pPr>
             <a:endParaRPr sz="100" dirty="0">
-              <a:latin typeface="Arial"/>
-              <a:ea typeface="Arial"/>
-              <a:cs typeface="Arial"/>
+              <a:latin typeface="Arial" panose="020B0604020202020204"/>
+              <a:ea typeface="Arial" panose="020B0604020202020204"/>
+              <a:cs typeface="Arial" panose="020B0604020202020204"/>
             </a:endParaRPr>
           </a:p>
           <a:p>
@@ -2444,7 +2792,6 @@
               <a:lnSpc>
                 <a:spcPct val="82000"/>
               </a:lnSpc>
-              <a:tabLst/>
             </a:pPr>
             <a:r>
               <a:rPr sz="1500" kern="0" spc="30" dirty="0">
@@ -2453,16 +2800,16 @@
                     <a:alpha val="100000"/>
                   </a:srgbClr>
                 </a:solidFill>
-                <a:latin typeface="Times New Roman"/>
-                <a:ea typeface="Times New Roman"/>
-                <a:cs typeface="Times New Roman"/>
+                <a:latin typeface="Times New Roman" panose="02020603050405020304"/>
+                <a:ea typeface="Times New Roman" panose="02020603050405020304"/>
+                <a:cs typeface="Times New Roman" panose="02020603050405020304"/>
               </a:rPr>
               <a:t>Temporal     Features</a:t>
             </a:r>
             <a:endParaRPr sz="1500" dirty="0">
-              <a:latin typeface="Times New Roman"/>
-              <a:ea typeface="Times New Roman"/>
-              <a:cs typeface="Times New Roman"/>
+              <a:latin typeface="Times New Roman" panose="02020603050405020304"/>
+              <a:ea typeface="Times New Roman" panose="02020603050405020304"/>
+              <a:cs typeface="Times New Roman" panose="02020603050405020304"/>
             </a:endParaRPr>
           </a:p>
         </p:txBody>
@@ -2666,8 +3013,265 @@
       </a:bgFillStyleLst>
     </a:fmtScheme>
   </a:themeElements>
-  <a:objectDefaults/>
-  <a:extraClrSchemeLst/>
+  <a:extLst>
+    <a:ext uri="{05A4C25C-085E-4340-85A3-A5531E510DB2}">
+      <thm15:themeFamily xmlns:thm15="http://schemas.microsoft.com/office/thememl/2012/main" name="Office Theme" id="{62F939B6-93AF-4DB8-9C6B-D6C7DFDC589F}" vid="{4A3C46E8-61CC-4603-A589-7422A47A8E4A}"/>
+    </a:ext>
+  </a:extLst>
+</a:theme>
+</file>
+
+<file path=ppt/theme/theme2.xml><?xml version="1.0" encoding="utf-8"?>
+<a:theme xmlns:a="http://schemas.openxmlformats.org/drawingml/2006/main" name="Office 主题">
+  <a:themeElements>
+    <a:clrScheme name="Office">
+      <a:dk1>
+        <a:sysClr val="windowText" lastClr="000000"/>
+      </a:dk1>
+      <a:lt1>
+        <a:sysClr val="window" lastClr="FFFFFF"/>
+      </a:lt1>
+      <a:dk2>
+        <a:srgbClr val="44546A"/>
+      </a:dk2>
+      <a:lt2>
+        <a:srgbClr val="E7E6E6"/>
+      </a:lt2>
+      <a:accent1>
+        <a:srgbClr val="5B9BD5"/>
+      </a:accent1>
+      <a:accent2>
+        <a:srgbClr val="ED7D31"/>
+      </a:accent2>
+      <a:accent3>
+        <a:srgbClr val="A5A5A5"/>
+      </a:accent3>
+      <a:accent4>
+        <a:srgbClr val="FFC000"/>
+      </a:accent4>
+      <a:accent5>
+        <a:srgbClr val="4472C4"/>
+      </a:accent5>
+      <a:accent6>
+        <a:srgbClr val="70AD47"/>
+      </a:accent6>
+      <a:hlink>
+        <a:srgbClr val="0563C1"/>
+      </a:hlink>
+      <a:folHlink>
+        <a:srgbClr val="954F72"/>
+      </a:folHlink>
+    </a:clrScheme>
+    <a:fontScheme name="Office">
+      <a:majorFont>
+        <a:latin typeface="Calibri Light"/>
+        <a:ea typeface=""/>
+        <a:cs typeface=""/>
+        <a:font script="Jpan" typeface="ＭＳ Ｐゴシック"/>
+        <a:font script="Hang" typeface="맑은 고딕"/>
+        <a:font script="Hans" typeface="宋体"/>
+        <a:font script="Hant" typeface="新細明體"/>
+        <a:font script="Arab" typeface="Times New Roman"/>
+        <a:font script="Hebr" typeface="Times New Roman"/>
+        <a:font script="Thai" typeface="Angsana New"/>
+        <a:font script="Ethi" typeface="Nyala"/>
+        <a:font script="Beng" typeface="Vrinda"/>
+        <a:font script="Gujr" typeface="Shruti"/>
+        <a:font script="Khmr" typeface="MoolBoran"/>
+        <a:font script="Knda" typeface="Tunga"/>
+        <a:font script="Guru" typeface="Raavi"/>
+        <a:font script="Cans" typeface="Euphemia"/>
+        <a:font script="Cher" typeface="Plantagenet Cherokee"/>
+        <a:font script="Yiii" typeface="Microsoft Yi Baiti"/>
+        <a:font script="Tibt" typeface="Microsoft Himalaya"/>
+        <a:font script="Thaa" typeface="MV Boli"/>
+        <a:font script="Deva" typeface="Mangal"/>
+        <a:font script="Telu" typeface="Gautami"/>
+        <a:font script="Taml" typeface="Latha"/>
+        <a:font script="Syrc" typeface="Estrangelo Edessa"/>
+        <a:font script="Orya" typeface="Kalinga"/>
+        <a:font script="Mlym" typeface="Kartika"/>
+        <a:font script="Laoo" typeface="DokChampa"/>
+        <a:font script="Sinh" typeface="Iskoola Pota"/>
+        <a:font script="Mong" typeface="Mongolian Baiti"/>
+        <a:font script="Viet" typeface="Times New Roman"/>
+        <a:font script="Uigh" typeface="Microsoft Uighur"/>
+        <a:font script="Geor" typeface="Sylfaen"/>
+      </a:majorFont>
+      <a:minorFont>
+        <a:latin typeface="Calibri"/>
+        <a:ea typeface=""/>
+        <a:cs typeface=""/>
+        <a:font script="Jpan" typeface="ＭＳ Ｐゴシック"/>
+        <a:font script="Hang" typeface="맑은 고딕"/>
+        <a:font script="Hans" typeface="宋体"/>
+        <a:font script="Hant" typeface="新細明體"/>
+        <a:font script="Arab" typeface="Arial"/>
+        <a:font script="Hebr" typeface="Arial"/>
+        <a:font script="Thai" typeface="Cordia New"/>
+        <a:font script="Ethi" typeface="Nyala"/>
+        <a:font script="Beng" typeface="Vrinda"/>
+        <a:font script="Gujr" typeface="Shruti"/>
+        <a:font script="Khmr" typeface="DaunPenh"/>
+        <a:font script="Knda" typeface="Tunga"/>
+        <a:font script="Guru" typeface="Raavi"/>
+        <a:font script="Cans" typeface="Euphemia"/>
+        <a:font script="Cher" typeface="Plantagenet Cherokee"/>
+        <a:font script="Yiii" typeface="Microsoft Yi Baiti"/>
+        <a:font script="Tibt" typeface="Microsoft Himalaya"/>
+        <a:font script="Thaa" typeface="MV Boli"/>
+        <a:font script="Deva" typeface="Mangal"/>
+        <a:font script="Telu" typeface="Gautami"/>
+        <a:font script="Taml" typeface="Latha"/>
+        <a:font script="Syrc" typeface="Estrangelo Edessa"/>
+        <a:font script="Orya" typeface="Kalinga"/>
+        <a:font script="Mlym" typeface="Kartika"/>
+        <a:font script="Laoo" typeface="DokChampa"/>
+        <a:font script="Sinh" typeface="Iskoola Pota"/>
+        <a:font script="Mong" typeface="Mongolian Baiti"/>
+        <a:font script="Viet" typeface="Arial"/>
+        <a:font script="Uigh" typeface="Microsoft Uighur"/>
+        <a:font script="Geor" typeface="Sylfaen"/>
+      </a:minorFont>
+    </a:fontScheme>
+    <a:fmtScheme name="Office">
+      <a:fillStyleLst>
+        <a:solidFill>
+          <a:schemeClr val="phClr"/>
+        </a:solidFill>
+        <a:gradFill rotWithShape="1">
+          <a:gsLst>
+            <a:gs pos="0">
+              <a:schemeClr val="phClr">
+                <a:lumMod val="110000"/>
+                <a:satMod val="105000"/>
+                <a:tint val="67000"/>
+              </a:schemeClr>
+            </a:gs>
+            <a:gs pos="50000">
+              <a:schemeClr val="phClr">
+                <a:lumMod val="105000"/>
+                <a:satMod val="103000"/>
+                <a:tint val="73000"/>
+              </a:schemeClr>
+            </a:gs>
+            <a:gs pos="100000">
+              <a:schemeClr val="phClr">
+                <a:lumMod val="105000"/>
+                <a:satMod val="109000"/>
+                <a:tint val="81000"/>
+              </a:schemeClr>
+            </a:gs>
+          </a:gsLst>
+          <a:lin ang="5400000" scaled="0"/>
+        </a:gradFill>
+        <a:gradFill rotWithShape="1">
+          <a:gsLst>
+            <a:gs pos="0">
+              <a:schemeClr val="phClr">
+                <a:satMod val="103000"/>
+                <a:lumMod val="102000"/>
+                <a:tint val="94000"/>
+              </a:schemeClr>
+            </a:gs>
+            <a:gs pos="50000">
+              <a:schemeClr val="phClr">
+                <a:satMod val="110000"/>
+                <a:lumMod val="100000"/>
+                <a:shade val="100000"/>
+              </a:schemeClr>
+            </a:gs>
+            <a:gs pos="100000">
+              <a:schemeClr val="phClr">
+                <a:lumMod val="99000"/>
+                <a:satMod val="120000"/>
+                <a:shade val="78000"/>
+              </a:schemeClr>
+            </a:gs>
+          </a:gsLst>
+          <a:lin ang="5400000" scaled="0"/>
+        </a:gradFill>
+      </a:fillStyleLst>
+      <a:lnStyleLst>
+        <a:ln w="6350" cap="flat" cmpd="sng" algn="ctr">
+          <a:solidFill>
+            <a:schemeClr val="phClr"/>
+          </a:solidFill>
+          <a:prstDash val="solid"/>
+          <a:miter lim="800000"/>
+        </a:ln>
+        <a:ln w="12700" cap="flat" cmpd="sng" algn="ctr">
+          <a:solidFill>
+            <a:schemeClr val="phClr"/>
+          </a:solidFill>
+          <a:prstDash val="solid"/>
+          <a:miter lim="800000"/>
+        </a:ln>
+        <a:ln w="19050" cap="flat" cmpd="sng" algn="ctr">
+          <a:solidFill>
+            <a:schemeClr val="phClr"/>
+          </a:solidFill>
+          <a:prstDash val="solid"/>
+          <a:miter lim="800000"/>
+        </a:ln>
+      </a:lnStyleLst>
+      <a:effectStyleLst>
+        <a:effectStyle>
+          <a:effectLst/>
+        </a:effectStyle>
+        <a:effectStyle>
+          <a:effectLst/>
+        </a:effectStyle>
+        <a:effectStyle>
+          <a:effectLst>
+            <a:outerShdw blurRad="57150" dist="19050" dir="5400000" algn="ctr" rotWithShape="0">
+              <a:srgbClr val="000000">
+                <a:alpha val="63000"/>
+              </a:srgbClr>
+            </a:outerShdw>
+          </a:effectLst>
+        </a:effectStyle>
+      </a:effectStyleLst>
+      <a:bgFillStyleLst>
+        <a:solidFill>
+          <a:schemeClr val="phClr"/>
+        </a:solidFill>
+        <a:solidFill>
+          <a:schemeClr val="phClr">
+            <a:tint val="95000"/>
+            <a:satMod val="170000"/>
+          </a:schemeClr>
+        </a:solidFill>
+        <a:gradFill rotWithShape="1">
+          <a:gsLst>
+            <a:gs pos="0">
+              <a:schemeClr val="phClr">
+                <a:tint val="93000"/>
+                <a:satMod val="150000"/>
+                <a:shade val="98000"/>
+                <a:lumMod val="102000"/>
+              </a:schemeClr>
+            </a:gs>
+            <a:gs pos="50000">
+              <a:schemeClr val="phClr">
+                <a:tint val="98000"/>
+                <a:satMod val="130000"/>
+                <a:shade val="90000"/>
+                <a:lumMod val="103000"/>
+              </a:schemeClr>
+            </a:gs>
+            <a:gs pos="100000">
+              <a:schemeClr val="phClr">
+                <a:shade val="63000"/>
+                <a:satMod val="120000"/>
+              </a:schemeClr>
+            </a:gs>
+          </a:gsLst>
+          <a:lin ang="5400000" scaled="0"/>
+        </a:gradFill>
+      </a:bgFillStyleLst>
+    </a:fmtScheme>
+  </a:themeElements>
   <a:extLst>
     <a:ext uri="{05A4C25C-085E-4340-85A3-A5531E510DB2}">
       <thm15:themeFamily xmlns:thm15="http://schemas.microsoft.com/office/thememl/2012/main" name="Office Theme" id="{62F939B6-93AF-4DB8-9C6B-D6C7DFDC589F}" vid="{4A3C46E8-61CC-4603-A589-7422A47A8E4A}"/>
